--- a/training/slides/Module_01_Introduction_to_DOE.pptx
+++ b/training/slides/Module_01_Introduction_to_DOE.pptx
@@ -3094,7 +3094,7 @@
     <p:bg>
       <p:bgPr>
         <a:solidFill>
-          <a:srgbClr val="1A1A2E"/>
+          <a:srgbClr val="1E1B4B"/>
         </a:solidFill>
         <a:effectLst/>
       </p:bgPr>
@@ -3115,13 +3115,13 @@
         <p:spPr>
           <a:xfrm>
             <a:off x="0" y="0"/>
-            <a:ext cx="137160" cy="6858000"/>
+            <a:ext cx="5943600" cy="6858000"/>
           </a:xfrm>
           <a:prstGeom prst="rect">
             <a:avLst/>
           </a:prstGeom>
           <a:solidFill>
-            <a:srgbClr val="007BFF"/>
+            <a:srgbClr val="1E1B4B"/>
           </a:solidFill>
           <a:ln>
             <a:noFill/>
@@ -3151,50 +3151,288 @@
       </p:sp>
       <p:sp>
         <p:nvSpPr>
-          <p:cNvPr id="3" name="TextBox 2"/>
+          <p:cNvPr id="3" name="Rectangle 2"/>
+          <p:cNvSpPr/>
+          <p:nvPr/>
+        </p:nvSpPr>
+        <p:spPr>
+          <a:xfrm>
+            <a:off x="5943600" y="0"/>
+            <a:ext cx="3200400" cy="6858000"/>
+          </a:xfrm>
+          <a:prstGeom prst="rect">
+            <a:avLst/>
+          </a:prstGeom>
+          <a:solidFill>
+            <a:srgbClr val="312E81"/>
+          </a:solidFill>
+          <a:ln>
+            <a:noFill/>
+          </a:ln>
+        </p:spPr>
+        <p:style>
+          <a:lnRef idx="1">
+            <a:schemeClr val="accent1"/>
+          </a:lnRef>
+          <a:fillRef idx="3">
+            <a:schemeClr val="accent1"/>
+          </a:fillRef>
+          <a:effectRef idx="2">
+            <a:schemeClr val="accent1"/>
+          </a:effectRef>
+          <a:fontRef idx="minor">
+            <a:schemeClr val="lt1"/>
+          </a:fontRef>
+        </p:style>
+        <p:txBody>
+          <a:bodyPr rtlCol="0" anchor="ctr"/>
+          <a:lstStyle/>
+          <a:p>
+            <a:pPr algn="ctr"/>
+          </a:p>
+        </p:txBody>
+      </p:sp>
+      <p:sp>
+        <p:nvSpPr>
+          <p:cNvPr id="4" name="Rectangle 3"/>
+          <p:cNvSpPr/>
+          <p:nvPr/>
+        </p:nvSpPr>
+        <p:spPr>
+          <a:xfrm>
+            <a:off x="9144000" y="0"/>
+            <a:ext cx="3047695" cy="6858000"/>
+          </a:xfrm>
+          <a:prstGeom prst="rect">
+            <a:avLst/>
+          </a:prstGeom>
+          <a:solidFill>
+            <a:srgbClr val="4338CA"/>
+          </a:solidFill>
+          <a:ln>
+            <a:noFill/>
+          </a:ln>
+        </p:spPr>
+        <p:style>
+          <a:lnRef idx="1">
+            <a:schemeClr val="accent1"/>
+          </a:lnRef>
+          <a:fillRef idx="3">
+            <a:schemeClr val="accent1"/>
+          </a:fillRef>
+          <a:effectRef idx="2">
+            <a:schemeClr val="accent1"/>
+          </a:effectRef>
+          <a:fontRef idx="minor">
+            <a:schemeClr val="lt1"/>
+          </a:fontRef>
+        </p:style>
+        <p:txBody>
+          <a:bodyPr rtlCol="0" anchor="ctr"/>
+          <a:lstStyle/>
+          <a:p>
+            <a:pPr algn="ctr"/>
+          </a:p>
+        </p:txBody>
+      </p:sp>
+      <p:sp>
+        <p:nvSpPr>
+          <p:cNvPr id="5" name="Rectangle 4"/>
+          <p:cNvSpPr/>
+          <p:nvPr/>
+        </p:nvSpPr>
+        <p:spPr>
+          <a:xfrm>
+            <a:off x="0" y="0"/>
+            <a:ext cx="73152" cy="6858000"/>
+          </a:xfrm>
+          <a:prstGeom prst="rect">
+            <a:avLst/>
+          </a:prstGeom>
+          <a:solidFill>
+            <a:srgbClr val="6366F1"/>
+          </a:solidFill>
+          <a:ln>
+            <a:noFill/>
+          </a:ln>
+        </p:spPr>
+        <p:style>
+          <a:lnRef idx="1">
+            <a:schemeClr val="accent1"/>
+          </a:lnRef>
+          <a:fillRef idx="3">
+            <a:schemeClr val="accent1"/>
+          </a:fillRef>
+          <a:effectRef idx="2">
+            <a:schemeClr val="accent1"/>
+          </a:effectRef>
+          <a:fontRef idx="minor">
+            <a:schemeClr val="lt1"/>
+          </a:fontRef>
+        </p:style>
+        <p:txBody>
+          <a:bodyPr rtlCol="0" anchor="ctr"/>
+          <a:lstStyle/>
+          <a:p>
+            <a:pPr algn="ctr"/>
+          </a:p>
+        </p:txBody>
+      </p:sp>
+      <p:sp>
+        <p:nvSpPr>
+          <p:cNvPr id="6" name="Oval 5"/>
+          <p:cNvSpPr/>
+          <p:nvPr/>
+        </p:nvSpPr>
+        <p:spPr>
+          <a:xfrm>
+            <a:off x="8229600" y="-914400"/>
+            <a:ext cx="4572000" cy="4572000"/>
+          </a:xfrm>
+          <a:prstGeom prst="ellipse">
+            <a:avLst/>
+          </a:prstGeom>
+          <a:solidFill>
+            <a:srgbClr val="6366F1">
+              <a:lumMod val="70000"/>
+              <a:lumOff val="30000"/>
+            </a:srgbClr>
+          </a:solidFill>
+          <a:ln>
+            <a:noFill/>
+          </a:ln>
+        </p:spPr>
+        <p:style>
+          <a:lnRef idx="1">
+            <a:schemeClr val="accent1"/>
+          </a:lnRef>
+          <a:fillRef idx="3">
+            <a:schemeClr val="accent1"/>
+          </a:fillRef>
+          <a:effectRef idx="2">
+            <a:schemeClr val="accent1"/>
+          </a:effectRef>
+          <a:fontRef idx="minor">
+            <a:schemeClr val="lt1"/>
+          </a:fontRef>
+        </p:style>
+        <p:txBody>
+          <a:bodyPr rtlCol="0" anchor="ctr"/>
+          <a:lstStyle/>
+          <a:p>
+            <a:pPr algn="ctr"/>
+          </a:p>
+        </p:txBody>
+      </p:sp>
+      <p:sp>
+        <p:nvSpPr>
+          <p:cNvPr id="7" name="Oval 6"/>
+          <p:cNvSpPr/>
+          <p:nvPr/>
+        </p:nvSpPr>
+        <p:spPr>
+          <a:xfrm>
+            <a:off x="-914400" y="3657600"/>
+            <a:ext cx="3657600" cy="3657600"/>
+          </a:xfrm>
+          <a:prstGeom prst="ellipse">
+            <a:avLst/>
+          </a:prstGeom>
+          <a:solidFill>
+            <a:srgbClr val="5046E5">
+              <a:lumMod val="60000"/>
+              <a:lumOff val="40000"/>
+            </a:srgbClr>
+          </a:solidFill>
+          <a:ln>
+            <a:noFill/>
+          </a:ln>
+        </p:spPr>
+        <p:style>
+          <a:lnRef idx="1">
+            <a:schemeClr val="accent1"/>
+          </a:lnRef>
+          <a:fillRef idx="3">
+            <a:schemeClr val="accent1"/>
+          </a:fillRef>
+          <a:effectRef idx="2">
+            <a:schemeClr val="accent1"/>
+          </a:effectRef>
+          <a:fontRef idx="minor">
+            <a:schemeClr val="lt1"/>
+          </a:fontRef>
+        </p:style>
+        <p:txBody>
+          <a:bodyPr rtlCol="0" anchor="ctr"/>
+          <a:lstStyle/>
+          <a:p>
+            <a:pPr algn="ctr"/>
+          </a:p>
+        </p:txBody>
+      </p:sp>
+      <p:sp>
+        <p:nvSpPr>
+          <p:cNvPr id="8" name="Rounded Rectangle 7"/>
+          <p:cNvSpPr/>
+          <p:nvPr/>
+        </p:nvSpPr>
+        <p:spPr>
+          <a:xfrm>
+            <a:off x="914400" y="1371600"/>
+            <a:ext cx="2377440" cy="438912"/>
+          </a:xfrm>
+          <a:prstGeom prst="roundRect">
+            <a:avLst/>
+          </a:prstGeom>
+          <a:solidFill>
+            <a:srgbClr val="312E81"/>
+          </a:solidFill>
+          <a:ln>
+            <a:noFill/>
+          </a:ln>
+        </p:spPr>
+        <p:style>
+          <a:lnRef idx="1">
+            <a:schemeClr val="accent1"/>
+          </a:lnRef>
+          <a:fillRef idx="3">
+            <a:schemeClr val="accent1"/>
+          </a:fillRef>
+          <a:effectRef idx="2">
+            <a:schemeClr val="accent1"/>
+          </a:effectRef>
+          <a:fontRef idx="minor">
+            <a:schemeClr val="lt1"/>
+          </a:fontRef>
+        </p:style>
+        <p:txBody>
+          <a:bodyPr rtlCol="0" anchor="ctr" lIns="137160"/>
+          <a:lstStyle/>
+          <a:p>
+            <a:pPr algn="l">
+              <a:defRPr sz="1400" b="1">
+                <a:solidFill>
+                  <a:srgbClr val="C7D2FE"/>
+                </a:solidFill>
+                <a:latin typeface="Consolas"/>
+              </a:defRPr>
+            </a:pPr>
+            <a:r>
+              <a:t>MODULE 1</a:t>
+            </a:r>
+          </a:p>
+        </p:txBody>
+      </p:sp>
+      <p:sp>
+        <p:nvSpPr>
+          <p:cNvPr id="9" name="TextBox 8"/>
           <p:cNvSpPr txBox="1"/>
           <p:nvPr/>
         </p:nvSpPr>
         <p:spPr>
           <a:xfrm>
-            <a:off x="914400" y="1097280"/>
-            <a:ext cx="10058400" cy="731520"/>
-          </a:xfrm>
-          <a:prstGeom prst="rect">
-            <a:avLst/>
-          </a:prstGeom>
-          <a:noFill/>
-        </p:spPr>
-        <p:txBody>
-          <a:bodyPr wrap="none">
-            <a:spAutoFit/>
-          </a:bodyPr>
-          <a:lstStyle/>
-          <a:p>
-            <a:pPr>
-              <a:defRPr sz="2000" b="1">
-                <a:solidFill>
-                  <a:srgbClr val="007BFF"/>
-                </a:solidFill>
-                <a:latin typeface="Calibri"/>
-              </a:defRPr>
-            </a:pPr>
-            <a:r>
-              <a:t>MODULE 1</a:t>
-            </a:r>
-          </a:p>
-        </p:txBody>
-      </p:sp>
-      <p:sp>
-        <p:nvSpPr>
-          <p:cNvPr id="4" name="TextBox 3"/>
-          <p:cNvSpPr txBox="1"/>
-          <p:nvPr/>
-        </p:nvSpPr>
-        <p:spPr>
-          <a:xfrm>
-            <a:off x="914400" y="2011680"/>
-            <a:ext cx="10058400" cy="1828800"/>
+            <a:off x="914400" y="2286000"/>
+            <a:ext cx="9144000" cy="2011680"/>
           </a:xfrm>
           <a:prstGeom prst="rect">
             <a:avLst/>
@@ -3207,30 +3445,34 @@
           </a:bodyPr>
           <a:lstStyle/>
           <a:p>
-            <a:pPr>
-              <a:defRPr sz="4400" b="1">
+            <a:pPr algn="l">
+              <a:defRPr sz="4000" b="1">
                 <a:solidFill>
                   <a:srgbClr val="FFFFFF"/>
                 </a:solidFill>
-                <a:latin typeface="Calibri"/>
-              </a:defRPr>
-            </a:pPr>
-            <a:r>
-              <a:t>Introduction to Design of Experiments</a:t>
-            </a:r>
-          </a:p>
-        </p:txBody>
-      </p:sp>
-      <p:sp>
-        <p:nvSpPr>
-          <p:cNvPr id="5" name="TextBox 4"/>
+                <a:latin typeface="Inter"/>
+              </a:defRPr>
+            </a:pPr>
+            <a:r>
+              <a:t>Introduction to</a:t>
+            </a:r>
+            <a:br/>
+            <a:r>
+              <a:t>Design of Experiments</a:t>
+            </a:r>
+          </a:p>
+        </p:txBody>
+      </p:sp>
+      <p:sp>
+        <p:nvSpPr>
+          <p:cNvPr id="10" name="TextBox 9"/>
           <p:cNvSpPr txBox="1"/>
           <p:nvPr/>
         </p:nvSpPr>
         <p:spPr>
           <a:xfrm>
-            <a:off x="914400" y="4114800"/>
-            <a:ext cx="9144000" cy="1371600"/>
+            <a:off x="914400" y="4389120"/>
+            <a:ext cx="8686800" cy="1371600"/>
           </a:xfrm>
           <a:prstGeom prst="rect">
             <a:avLst/>
@@ -3243,19 +3485,18 @@
           </a:bodyPr>
           <a:lstStyle/>
           <a:p>
-            <a:pPr>
-              <a:defRPr sz="2200">
-                <a:solidFill>
-                  <a:srgbClr val="CCCCCC"/>
-                </a:solidFill>
-                <a:latin typeface="Calibri"/>
+            <a:pPr algn="l">
+              <a:defRPr sz="1900" b="0">
+                <a:solidFill>
+                  <a:srgbClr val="A5B4FC"/>
+                </a:solidFill>
+                <a:latin typeface="Inter"/>
               </a:defRPr>
             </a:pPr>
             <a:r>
               <a:t>Why systematic experimentation beats trial-and-error</a:t>
             </a:r>
             <a:br/>
-            <a:br/>
             <a:r>
               <a:t>DOE Helper Training Course</a:t>
             </a:r>
@@ -3264,14 +3505,14 @@
       </p:sp>
       <p:sp>
         <p:nvSpPr>
-          <p:cNvPr id="6" name="TextBox 5"/>
+          <p:cNvPr id="11" name="TextBox 10"/>
           <p:cNvSpPr txBox="1"/>
           <p:nvPr/>
         </p:nvSpPr>
         <p:spPr>
           <a:xfrm>
-            <a:off x="914400" y="6126480"/>
-            <a:ext cx="10058400" cy="457200"/>
+            <a:off x="731520" y="6400800"/>
+            <a:ext cx="10058400" cy="365760"/>
           </a:xfrm>
           <a:prstGeom prst="rect">
             <a:avLst/>
@@ -3284,16 +3525,16 @@
           </a:bodyPr>
           <a:lstStyle/>
           <a:p>
-            <a:pPr>
-              <a:defRPr sz="1200">
-                <a:solidFill>
-                  <a:srgbClr val="888888"/>
-                </a:solidFill>
-                <a:latin typeface="Calibri"/>
-              </a:defRPr>
-            </a:pPr>
-            <a:r>
-              <a:t>Copyright © 2026 Martin J. Gallagher. Licensed under GPL-3.0-or-later.</a:t>
+            <a:pPr algn="l">
+              <a:defRPr sz="1000" b="0">
+                <a:solidFill>
+                  <a:srgbClr val="6366F1"/>
+                </a:solidFill>
+                <a:latin typeface="Consolas"/>
+              </a:defRPr>
+            </a:pPr>
+            <a:r>
+              <a:t>© 2026 Martin J. Gallagher  |  GPL-3.0-or-later  |  doehelper.com</a:t>
             </a:r>
           </a:p>
         </p:txBody>
@@ -3312,7 +3553,7 @@
     <p:bg>
       <p:bgPr>
         <a:solidFill>
-          <a:srgbClr val="1A1A2E"/>
+          <a:srgbClr val="1E1B4B"/>
         </a:solidFill>
         <a:effectLst/>
       </p:bgPr>
@@ -3326,56 +3567,20 @@
       <p:grpSpPr/>
       <p:sp>
         <p:nvSpPr>
-          <p:cNvPr id="2" name="TextBox 1"/>
-          <p:cNvSpPr txBox="1"/>
-          <p:nvPr/>
-        </p:nvSpPr>
-        <p:spPr>
-          <a:xfrm>
-            <a:off x="731520" y="457200"/>
-            <a:ext cx="10515600" cy="914400"/>
+          <p:cNvPr id="2" name="Rectangle 1"/>
+          <p:cNvSpPr/>
+          <p:nvPr/>
+        </p:nvSpPr>
+        <p:spPr>
+          <a:xfrm>
+            <a:off x="3657600" y="0"/>
+            <a:ext cx="4572000" cy="6858000"/>
           </a:xfrm>
           <a:prstGeom prst="rect">
             <a:avLst/>
           </a:prstGeom>
-          <a:noFill/>
-        </p:spPr>
-        <p:txBody>
-          <a:bodyPr wrap="none">
-            <a:spAutoFit/>
-          </a:bodyPr>
-          <a:lstStyle/>
-          <a:p>
-            <a:pPr>
-              <a:defRPr sz="3400" b="1">
-                <a:solidFill>
-                  <a:srgbClr val="FFFFFF"/>
-                </a:solidFill>
-                <a:latin typeface="Calibri"/>
-              </a:defRPr>
-            </a:pPr>
-            <a:r>
-              <a:t>Key Takeaways</a:t>
-            </a:r>
-          </a:p>
-        </p:txBody>
-      </p:sp>
-      <p:sp>
-        <p:nvSpPr>
-          <p:cNvPr id="3" name="Rounded Rectangle 2"/>
-          <p:cNvSpPr/>
-          <p:nvPr/>
-        </p:nvSpPr>
-        <p:spPr>
-          <a:xfrm>
-            <a:off x="731520" y="1645920"/>
-            <a:ext cx="10515600" cy="822960"/>
-          </a:xfrm>
-          <a:prstGeom prst="roundRect">
-            <a:avLst/>
-          </a:prstGeom>
           <a:solidFill>
-            <a:srgbClr val="2A2A4A"/>
+            <a:srgbClr val="312E81"/>
           </a:solidFill>
           <a:ln>
             <a:noFill/>
@@ -3396,39 +3601,29 @@
           </a:fontRef>
         </p:style>
         <p:txBody>
-          <a:bodyPr rtlCol="0" anchor="ctr" lIns="274320"/>
-          <a:lstStyle/>
-          <a:p>
-            <a:pPr algn="ctr">
-              <a:defRPr sz="2200">
-                <a:solidFill>
-                  <a:srgbClr val="FFFFFF"/>
-                </a:solidFill>
-                <a:latin typeface="Calibri"/>
-              </a:defRPr>
-            </a:pPr>
-            <a:r>
-              <a:t>DOE is a systematic, statistically rigorous way to experiment</a:t>
-            </a:r>
-          </a:p>
-        </p:txBody>
-      </p:sp>
-      <p:sp>
-        <p:nvSpPr>
-          <p:cNvPr id="4" name="Rounded Rectangle 3"/>
+          <a:bodyPr rtlCol="0" anchor="ctr"/>
+          <a:lstStyle/>
+          <a:p>
+            <a:pPr algn="ctr"/>
+          </a:p>
+        </p:txBody>
+      </p:sp>
+      <p:sp>
+        <p:nvSpPr>
+          <p:cNvPr id="3" name="Rectangle 2"/>
           <p:cNvSpPr/>
           <p:nvPr/>
         </p:nvSpPr>
         <p:spPr>
           <a:xfrm>
-            <a:off x="731520" y="2606040"/>
-            <a:ext cx="10515600" cy="822960"/>
-          </a:xfrm>
-          <a:prstGeom prst="roundRect">
+            <a:off x="8229600" y="0"/>
+            <a:ext cx="3962095" cy="6858000"/>
+          </a:xfrm>
+          <a:prstGeom prst="rect">
             <a:avLst/>
           </a:prstGeom>
           <a:solidFill>
-            <a:srgbClr val="2A2A4A"/>
+            <a:srgbClr val="4338CA"/>
           </a:solidFill>
           <a:ln>
             <a:noFill/>
@@ -3449,19 +3644,45 @@
           </a:fontRef>
         </p:style>
         <p:txBody>
-          <a:bodyPr rtlCol="0" anchor="ctr" lIns="274320"/>
-          <a:lstStyle/>
-          <a:p>
-            <a:pPr algn="ctr">
-              <a:defRPr sz="2200">
+          <a:bodyPr rtlCol="0" anchor="ctr"/>
+          <a:lstStyle/>
+          <a:p>
+            <a:pPr algn="ctr"/>
+          </a:p>
+        </p:txBody>
+      </p:sp>
+      <p:sp>
+        <p:nvSpPr>
+          <p:cNvPr id="4" name="TextBox 3"/>
+          <p:cNvSpPr txBox="1"/>
+          <p:nvPr/>
+        </p:nvSpPr>
+        <p:spPr>
+          <a:xfrm>
+            <a:off x="731520" y="365760"/>
+            <a:ext cx="10058400" cy="640080"/>
+          </a:xfrm>
+          <a:prstGeom prst="rect">
+            <a:avLst/>
+          </a:prstGeom>
+          <a:noFill/>
+        </p:spPr>
+        <p:txBody>
+          <a:bodyPr wrap="square">
+            <a:spAutoFit/>
+          </a:bodyPr>
+          <a:lstStyle/>
+          <a:p>
+            <a:pPr algn="l">
+              <a:defRPr sz="3000" b="1">
                 <a:solidFill>
                   <a:srgbClr val="FFFFFF"/>
                 </a:solidFill>
-                <a:latin typeface="Calibri"/>
-              </a:defRPr>
-            </a:pPr>
-            <a:r>
-              <a:t>OVAT wastes runs and misses interactions</a:t>
+                <a:latin typeface="Inter"/>
+              </a:defRPr>
+            </a:pPr>
+            <a:r>
+              <a:t>Key Takeaways</a:t>
             </a:r>
           </a:p>
         </p:txBody>
@@ -3474,14 +3695,14 @@
         </p:nvSpPr>
         <p:spPr>
           <a:xfrm>
-            <a:off x="731520" y="3566160"/>
-            <a:ext cx="10515600" cy="822960"/>
+            <a:off x="731520" y="1280160"/>
+            <a:ext cx="10515600" cy="777240"/>
           </a:xfrm>
           <a:prstGeom prst="roundRect">
             <a:avLst/>
           </a:prstGeom>
           <a:solidFill>
-            <a:srgbClr val="2A2A4A"/>
+            <a:srgbClr val="312E81"/>
           </a:solidFill>
           <a:ln>
             <a:noFill/>
@@ -3502,39 +3723,29 @@
           </a:fontRef>
         </p:style>
         <p:txBody>
-          <a:bodyPr rtlCol="0" anchor="ctr" lIns="274320"/>
-          <a:lstStyle/>
-          <a:p>
-            <a:pPr algn="ctr">
-              <a:defRPr sz="2200">
-                <a:solidFill>
-                  <a:srgbClr val="FFFFFF"/>
-                </a:solidFill>
-                <a:latin typeface="Calibri"/>
-              </a:defRPr>
-            </a:pPr>
-            <a:r>
-              <a:t>Effect sparsity: most systems have only a few important factors</a:t>
-            </a:r>
-          </a:p>
-        </p:txBody>
-      </p:sp>
-      <p:sp>
-        <p:nvSpPr>
-          <p:cNvPr id="6" name="Rounded Rectangle 5"/>
+          <a:bodyPr rtlCol="0" anchor="ctr"/>
+          <a:lstStyle/>
+          <a:p>
+            <a:pPr algn="ctr"/>
+          </a:p>
+        </p:txBody>
+      </p:sp>
+      <p:sp>
+        <p:nvSpPr>
+          <p:cNvPr id="6" name="Oval 5"/>
           <p:cNvSpPr/>
           <p:nvPr/>
         </p:nvSpPr>
         <p:spPr>
           <a:xfrm>
-            <a:off x="731520" y="4526280"/>
-            <a:ext cx="10515600" cy="822960"/>
-          </a:xfrm>
-          <a:prstGeom prst="roundRect">
+            <a:off x="1005840" y="1508760"/>
+            <a:ext cx="320040" cy="320040"/>
+          </a:xfrm>
+          <a:prstGeom prst="ellipse">
             <a:avLst/>
           </a:prstGeom>
           <a:solidFill>
-            <a:srgbClr val="2A2A4A"/>
+            <a:srgbClr val="5046E5"/>
           </a:solidFill>
           <a:ln>
             <a:noFill/>
@@ -3555,39 +3766,65 @@
           </a:fontRef>
         </p:style>
         <p:txBody>
-          <a:bodyPr rtlCol="0" anchor="ctr" lIns="274320"/>
-          <a:lstStyle/>
-          <a:p>
-            <a:pPr algn="ctr">
-              <a:defRPr sz="2200">
+          <a:bodyPr rtlCol="0" anchor="ctr"/>
+          <a:lstStyle/>
+          <a:p>
+            <a:pPr algn="ctr"/>
+          </a:p>
+        </p:txBody>
+      </p:sp>
+      <p:sp>
+        <p:nvSpPr>
+          <p:cNvPr id="7" name="TextBox 6"/>
+          <p:cNvSpPr txBox="1"/>
+          <p:nvPr/>
+        </p:nvSpPr>
+        <p:spPr>
+          <a:xfrm>
+            <a:off x="1554480" y="1325880"/>
+            <a:ext cx="9418320" cy="777240"/>
+          </a:xfrm>
+          <a:prstGeom prst="rect">
+            <a:avLst/>
+          </a:prstGeom>
+          <a:noFill/>
+        </p:spPr>
+        <p:txBody>
+          <a:bodyPr wrap="square" anchor="ctr">
+            <a:spAutoFit/>
+          </a:bodyPr>
+          <a:lstStyle/>
+          <a:p>
+            <a:pPr algn="l">
+              <a:defRPr sz="1800" b="0">
                 <a:solidFill>
                   <a:srgbClr val="FFFFFF"/>
                 </a:solidFill>
-                <a:latin typeface="Calibri"/>
-              </a:defRPr>
-            </a:pPr>
-            <a:r>
-              <a:t>doe-helper automates the entire DOE workflow via the CLI</a:t>
-            </a:r>
-          </a:p>
-        </p:txBody>
-      </p:sp>
-      <p:sp>
-        <p:nvSpPr>
-          <p:cNvPr id="7" name="Rounded Rectangle 6"/>
+                <a:latin typeface="Inter"/>
+              </a:defRPr>
+            </a:pPr>
+            <a:r>
+              <a:t>DOE is a systematic, statistically rigorous way to experiment</a:t>
+            </a:r>
+          </a:p>
+        </p:txBody>
+      </p:sp>
+      <p:sp>
+        <p:nvSpPr>
+          <p:cNvPr id="8" name="Rounded Rectangle 7"/>
           <p:cNvSpPr/>
           <p:nvPr/>
         </p:nvSpPr>
         <p:spPr>
           <a:xfrm>
-            <a:off x="731520" y="5486400"/>
-            <a:ext cx="10515600" cy="822960"/>
+            <a:off x="731520" y="2167128"/>
+            <a:ext cx="10515600" cy="777240"/>
           </a:xfrm>
           <a:prstGeom prst="roundRect">
             <a:avLst/>
           </a:prstGeom>
           <a:solidFill>
-            <a:srgbClr val="2A2A4A"/>
+            <a:srgbClr val="312E81"/>
           </a:solidFill>
           <a:ln>
             <a:noFill/>
@@ -3608,19 +3845,490 @@
           </a:fontRef>
         </p:style>
         <p:txBody>
-          <a:bodyPr rtlCol="0" anchor="ctr" lIns="274320"/>
-          <a:lstStyle/>
-          <a:p>
-            <a:pPr algn="ctr">
-              <a:defRPr sz="2200">
+          <a:bodyPr rtlCol="0" anchor="ctr"/>
+          <a:lstStyle/>
+          <a:p>
+            <a:pPr algn="ctr"/>
+          </a:p>
+        </p:txBody>
+      </p:sp>
+      <p:sp>
+        <p:nvSpPr>
+          <p:cNvPr id="9" name="Oval 8"/>
+          <p:cNvSpPr/>
+          <p:nvPr/>
+        </p:nvSpPr>
+        <p:spPr>
+          <a:xfrm>
+            <a:off x="1005840" y="2395728"/>
+            <a:ext cx="320040" cy="320040"/>
+          </a:xfrm>
+          <a:prstGeom prst="ellipse">
+            <a:avLst/>
+          </a:prstGeom>
+          <a:solidFill>
+            <a:srgbClr val="5046E5"/>
+          </a:solidFill>
+          <a:ln>
+            <a:noFill/>
+          </a:ln>
+        </p:spPr>
+        <p:style>
+          <a:lnRef idx="1">
+            <a:schemeClr val="accent1"/>
+          </a:lnRef>
+          <a:fillRef idx="3">
+            <a:schemeClr val="accent1"/>
+          </a:fillRef>
+          <a:effectRef idx="2">
+            <a:schemeClr val="accent1"/>
+          </a:effectRef>
+          <a:fontRef idx="minor">
+            <a:schemeClr val="lt1"/>
+          </a:fontRef>
+        </p:style>
+        <p:txBody>
+          <a:bodyPr rtlCol="0" anchor="ctr"/>
+          <a:lstStyle/>
+          <a:p>
+            <a:pPr algn="ctr"/>
+          </a:p>
+        </p:txBody>
+      </p:sp>
+      <p:sp>
+        <p:nvSpPr>
+          <p:cNvPr id="10" name="TextBox 9"/>
+          <p:cNvSpPr txBox="1"/>
+          <p:nvPr/>
+        </p:nvSpPr>
+        <p:spPr>
+          <a:xfrm>
+            <a:off x="1554480" y="2212848"/>
+            <a:ext cx="9418320" cy="777240"/>
+          </a:xfrm>
+          <a:prstGeom prst="rect">
+            <a:avLst/>
+          </a:prstGeom>
+          <a:noFill/>
+        </p:spPr>
+        <p:txBody>
+          <a:bodyPr wrap="square" anchor="ctr">
+            <a:spAutoFit/>
+          </a:bodyPr>
+          <a:lstStyle/>
+          <a:p>
+            <a:pPr algn="l">
+              <a:defRPr sz="1800" b="0">
                 <a:solidFill>
                   <a:srgbClr val="FFFFFF"/>
                 </a:solidFill>
-                <a:latin typeface="Calibri"/>
-              </a:defRPr>
-            </a:pPr>
-            <a:r>
-              <a:t>The workflow: define -&gt; design -&gt; run -&gt; analyse -&gt; optimise</a:t>
+                <a:latin typeface="Inter"/>
+              </a:defRPr>
+            </a:pPr>
+            <a:r>
+              <a:t>OVAT wastes runs and misses interactions</a:t>
+            </a:r>
+          </a:p>
+        </p:txBody>
+      </p:sp>
+      <p:sp>
+        <p:nvSpPr>
+          <p:cNvPr id="11" name="Rounded Rectangle 10"/>
+          <p:cNvSpPr/>
+          <p:nvPr/>
+        </p:nvSpPr>
+        <p:spPr>
+          <a:xfrm>
+            <a:off x="731520" y="3054096"/>
+            <a:ext cx="10515600" cy="777240"/>
+          </a:xfrm>
+          <a:prstGeom prst="roundRect">
+            <a:avLst/>
+          </a:prstGeom>
+          <a:solidFill>
+            <a:srgbClr val="312E81"/>
+          </a:solidFill>
+          <a:ln>
+            <a:noFill/>
+          </a:ln>
+        </p:spPr>
+        <p:style>
+          <a:lnRef idx="1">
+            <a:schemeClr val="accent1"/>
+          </a:lnRef>
+          <a:fillRef idx="3">
+            <a:schemeClr val="accent1"/>
+          </a:fillRef>
+          <a:effectRef idx="2">
+            <a:schemeClr val="accent1"/>
+          </a:effectRef>
+          <a:fontRef idx="minor">
+            <a:schemeClr val="lt1"/>
+          </a:fontRef>
+        </p:style>
+        <p:txBody>
+          <a:bodyPr rtlCol="0" anchor="ctr"/>
+          <a:lstStyle/>
+          <a:p>
+            <a:pPr algn="ctr"/>
+          </a:p>
+        </p:txBody>
+      </p:sp>
+      <p:sp>
+        <p:nvSpPr>
+          <p:cNvPr id="12" name="Oval 11"/>
+          <p:cNvSpPr/>
+          <p:nvPr/>
+        </p:nvSpPr>
+        <p:spPr>
+          <a:xfrm>
+            <a:off x="1005840" y="3282696"/>
+            <a:ext cx="320040" cy="320040"/>
+          </a:xfrm>
+          <a:prstGeom prst="ellipse">
+            <a:avLst/>
+          </a:prstGeom>
+          <a:solidFill>
+            <a:srgbClr val="5046E5"/>
+          </a:solidFill>
+          <a:ln>
+            <a:noFill/>
+          </a:ln>
+        </p:spPr>
+        <p:style>
+          <a:lnRef idx="1">
+            <a:schemeClr val="accent1"/>
+          </a:lnRef>
+          <a:fillRef idx="3">
+            <a:schemeClr val="accent1"/>
+          </a:fillRef>
+          <a:effectRef idx="2">
+            <a:schemeClr val="accent1"/>
+          </a:effectRef>
+          <a:fontRef idx="minor">
+            <a:schemeClr val="lt1"/>
+          </a:fontRef>
+        </p:style>
+        <p:txBody>
+          <a:bodyPr rtlCol="0" anchor="ctr"/>
+          <a:lstStyle/>
+          <a:p>
+            <a:pPr algn="ctr"/>
+          </a:p>
+        </p:txBody>
+      </p:sp>
+      <p:sp>
+        <p:nvSpPr>
+          <p:cNvPr id="13" name="TextBox 12"/>
+          <p:cNvSpPr txBox="1"/>
+          <p:nvPr/>
+        </p:nvSpPr>
+        <p:spPr>
+          <a:xfrm>
+            <a:off x="1554480" y="3099816"/>
+            <a:ext cx="9418320" cy="777240"/>
+          </a:xfrm>
+          <a:prstGeom prst="rect">
+            <a:avLst/>
+          </a:prstGeom>
+          <a:noFill/>
+        </p:spPr>
+        <p:txBody>
+          <a:bodyPr wrap="square" anchor="ctr">
+            <a:spAutoFit/>
+          </a:bodyPr>
+          <a:lstStyle/>
+          <a:p>
+            <a:pPr algn="l">
+              <a:defRPr sz="1800" b="0">
+                <a:solidFill>
+                  <a:srgbClr val="FFFFFF"/>
+                </a:solidFill>
+                <a:latin typeface="Inter"/>
+              </a:defRPr>
+            </a:pPr>
+            <a:r>
+              <a:t>Effect sparsity: most systems have only a few important factors</a:t>
+            </a:r>
+          </a:p>
+        </p:txBody>
+      </p:sp>
+      <p:sp>
+        <p:nvSpPr>
+          <p:cNvPr id="14" name="Rounded Rectangle 13"/>
+          <p:cNvSpPr/>
+          <p:nvPr/>
+        </p:nvSpPr>
+        <p:spPr>
+          <a:xfrm>
+            <a:off x="731520" y="3941064"/>
+            <a:ext cx="10515600" cy="777240"/>
+          </a:xfrm>
+          <a:prstGeom prst="roundRect">
+            <a:avLst/>
+          </a:prstGeom>
+          <a:solidFill>
+            <a:srgbClr val="312E81"/>
+          </a:solidFill>
+          <a:ln>
+            <a:noFill/>
+          </a:ln>
+        </p:spPr>
+        <p:style>
+          <a:lnRef idx="1">
+            <a:schemeClr val="accent1"/>
+          </a:lnRef>
+          <a:fillRef idx="3">
+            <a:schemeClr val="accent1"/>
+          </a:fillRef>
+          <a:effectRef idx="2">
+            <a:schemeClr val="accent1"/>
+          </a:effectRef>
+          <a:fontRef idx="minor">
+            <a:schemeClr val="lt1"/>
+          </a:fontRef>
+        </p:style>
+        <p:txBody>
+          <a:bodyPr rtlCol="0" anchor="ctr"/>
+          <a:lstStyle/>
+          <a:p>
+            <a:pPr algn="ctr"/>
+          </a:p>
+        </p:txBody>
+      </p:sp>
+      <p:sp>
+        <p:nvSpPr>
+          <p:cNvPr id="15" name="Oval 14"/>
+          <p:cNvSpPr/>
+          <p:nvPr/>
+        </p:nvSpPr>
+        <p:spPr>
+          <a:xfrm>
+            <a:off x="1005840" y="4169664"/>
+            <a:ext cx="320040" cy="320040"/>
+          </a:xfrm>
+          <a:prstGeom prst="ellipse">
+            <a:avLst/>
+          </a:prstGeom>
+          <a:solidFill>
+            <a:srgbClr val="5046E5"/>
+          </a:solidFill>
+          <a:ln>
+            <a:noFill/>
+          </a:ln>
+        </p:spPr>
+        <p:style>
+          <a:lnRef idx="1">
+            <a:schemeClr val="accent1"/>
+          </a:lnRef>
+          <a:fillRef idx="3">
+            <a:schemeClr val="accent1"/>
+          </a:fillRef>
+          <a:effectRef idx="2">
+            <a:schemeClr val="accent1"/>
+          </a:effectRef>
+          <a:fontRef idx="minor">
+            <a:schemeClr val="lt1"/>
+          </a:fontRef>
+        </p:style>
+        <p:txBody>
+          <a:bodyPr rtlCol="0" anchor="ctr"/>
+          <a:lstStyle/>
+          <a:p>
+            <a:pPr algn="ctr"/>
+          </a:p>
+        </p:txBody>
+      </p:sp>
+      <p:sp>
+        <p:nvSpPr>
+          <p:cNvPr id="16" name="TextBox 15"/>
+          <p:cNvSpPr txBox="1"/>
+          <p:nvPr/>
+        </p:nvSpPr>
+        <p:spPr>
+          <a:xfrm>
+            <a:off x="1554480" y="3986784"/>
+            <a:ext cx="9418320" cy="777240"/>
+          </a:xfrm>
+          <a:prstGeom prst="rect">
+            <a:avLst/>
+          </a:prstGeom>
+          <a:noFill/>
+        </p:spPr>
+        <p:txBody>
+          <a:bodyPr wrap="square" anchor="ctr">
+            <a:spAutoFit/>
+          </a:bodyPr>
+          <a:lstStyle/>
+          <a:p>
+            <a:pPr algn="l">
+              <a:defRPr sz="1800" b="0">
+                <a:solidFill>
+                  <a:srgbClr val="FFFFFF"/>
+                </a:solidFill>
+                <a:latin typeface="Inter"/>
+              </a:defRPr>
+            </a:pPr>
+            <a:r>
+              <a:t>doe-helper automates the entire DOE workflow via the CLI</a:t>
+            </a:r>
+          </a:p>
+        </p:txBody>
+      </p:sp>
+      <p:sp>
+        <p:nvSpPr>
+          <p:cNvPr id="17" name="Rounded Rectangle 16"/>
+          <p:cNvSpPr/>
+          <p:nvPr/>
+        </p:nvSpPr>
+        <p:spPr>
+          <a:xfrm>
+            <a:off x="731520" y="4828032"/>
+            <a:ext cx="10515600" cy="777240"/>
+          </a:xfrm>
+          <a:prstGeom prst="roundRect">
+            <a:avLst/>
+          </a:prstGeom>
+          <a:solidFill>
+            <a:srgbClr val="312E81"/>
+          </a:solidFill>
+          <a:ln>
+            <a:noFill/>
+          </a:ln>
+        </p:spPr>
+        <p:style>
+          <a:lnRef idx="1">
+            <a:schemeClr val="accent1"/>
+          </a:lnRef>
+          <a:fillRef idx="3">
+            <a:schemeClr val="accent1"/>
+          </a:fillRef>
+          <a:effectRef idx="2">
+            <a:schemeClr val="accent1"/>
+          </a:effectRef>
+          <a:fontRef idx="minor">
+            <a:schemeClr val="lt1"/>
+          </a:fontRef>
+        </p:style>
+        <p:txBody>
+          <a:bodyPr rtlCol="0" anchor="ctr"/>
+          <a:lstStyle/>
+          <a:p>
+            <a:pPr algn="ctr"/>
+          </a:p>
+        </p:txBody>
+      </p:sp>
+      <p:sp>
+        <p:nvSpPr>
+          <p:cNvPr id="18" name="Oval 17"/>
+          <p:cNvSpPr/>
+          <p:nvPr/>
+        </p:nvSpPr>
+        <p:spPr>
+          <a:xfrm>
+            <a:off x="1005840" y="5056632"/>
+            <a:ext cx="320040" cy="320040"/>
+          </a:xfrm>
+          <a:prstGeom prst="ellipse">
+            <a:avLst/>
+          </a:prstGeom>
+          <a:solidFill>
+            <a:srgbClr val="5046E5"/>
+          </a:solidFill>
+          <a:ln>
+            <a:noFill/>
+          </a:ln>
+        </p:spPr>
+        <p:style>
+          <a:lnRef idx="1">
+            <a:schemeClr val="accent1"/>
+          </a:lnRef>
+          <a:fillRef idx="3">
+            <a:schemeClr val="accent1"/>
+          </a:fillRef>
+          <a:effectRef idx="2">
+            <a:schemeClr val="accent1"/>
+          </a:effectRef>
+          <a:fontRef idx="minor">
+            <a:schemeClr val="lt1"/>
+          </a:fontRef>
+        </p:style>
+        <p:txBody>
+          <a:bodyPr rtlCol="0" anchor="ctr"/>
+          <a:lstStyle/>
+          <a:p>
+            <a:pPr algn="ctr"/>
+          </a:p>
+        </p:txBody>
+      </p:sp>
+      <p:sp>
+        <p:nvSpPr>
+          <p:cNvPr id="19" name="TextBox 18"/>
+          <p:cNvSpPr txBox="1"/>
+          <p:nvPr/>
+        </p:nvSpPr>
+        <p:spPr>
+          <a:xfrm>
+            <a:off x="1554480" y="4873752"/>
+            <a:ext cx="9418320" cy="777240"/>
+          </a:xfrm>
+          <a:prstGeom prst="rect">
+            <a:avLst/>
+          </a:prstGeom>
+          <a:noFill/>
+        </p:spPr>
+        <p:txBody>
+          <a:bodyPr wrap="square" anchor="ctr">
+            <a:spAutoFit/>
+          </a:bodyPr>
+          <a:lstStyle/>
+          <a:p>
+            <a:pPr algn="l">
+              <a:defRPr sz="1800" b="0">
+                <a:solidFill>
+                  <a:srgbClr val="FFFFFF"/>
+                </a:solidFill>
+                <a:latin typeface="Inter"/>
+              </a:defRPr>
+            </a:pPr>
+            <a:r>
+              <a:t>The workflow: define → design → run → analyse → optimise</a:t>
+            </a:r>
+          </a:p>
+        </p:txBody>
+      </p:sp>
+      <p:sp>
+        <p:nvSpPr>
+          <p:cNvPr id="20" name="TextBox 19"/>
+          <p:cNvSpPr txBox="1"/>
+          <p:nvPr/>
+        </p:nvSpPr>
+        <p:spPr>
+          <a:xfrm>
+            <a:off x="731520" y="6400800"/>
+            <a:ext cx="10058400" cy="365760"/>
+          </a:xfrm>
+          <a:prstGeom prst="rect">
+            <a:avLst/>
+          </a:prstGeom>
+          <a:noFill/>
+        </p:spPr>
+        <p:txBody>
+          <a:bodyPr wrap="square">
+            <a:spAutoFit/>
+          </a:bodyPr>
+          <a:lstStyle/>
+          <a:p>
+            <a:pPr algn="l">
+              <a:defRPr sz="1000" b="0">
+                <a:solidFill>
+                  <a:srgbClr val="6366F1"/>
+                </a:solidFill>
+                <a:latin typeface="Consolas"/>
+              </a:defRPr>
+            </a:pPr>
+            <a:r>
+              <a:t>© 2026 Martin J. Gallagher  |  GPL-3.0-or-later</a:t>
             </a:r>
           </a:p>
         </p:txBody>
@@ -3639,7 +4347,7 @@
     <p:bg>
       <p:bgPr>
         <a:solidFill>
-          <a:srgbClr val="FFFFFF"/>
+          <a:srgbClr val="FAFAFA"/>
         </a:solidFill>
         <a:effectLst/>
       </p:bgPr>
@@ -3660,13 +4368,13 @@
         <p:spPr>
           <a:xfrm>
             <a:off x="0" y="0"/>
-            <a:ext cx="12191695" cy="54864"/>
+            <a:ext cx="12191695" cy="45720"/>
           </a:xfrm>
           <a:prstGeom prst="rect">
             <a:avLst/>
           </a:prstGeom>
           <a:solidFill>
-            <a:srgbClr val="FF8C00"/>
+            <a:srgbClr val="D97706"/>
           </a:solidFill>
           <a:ln>
             <a:noFill/>
@@ -3702,14 +4410,14 @@
         </p:nvSpPr>
         <p:spPr>
           <a:xfrm>
-            <a:off x="731520" y="320040"/>
-            <a:ext cx="2011680" cy="502920"/>
+            <a:off x="548640" y="274320"/>
+            <a:ext cx="2194560" cy="457200"/>
           </a:xfrm>
           <a:prstGeom prst="roundRect">
             <a:avLst/>
           </a:prstGeom>
           <a:solidFill>
-            <a:srgbClr val="FF8C00"/>
+            <a:srgbClr val="D97706"/>
           </a:solidFill>
           <a:ln>
             <a:noFill/>
@@ -3734,11 +4442,11 @@
           <a:lstStyle/>
           <a:p>
             <a:pPr algn="ctr">
-              <a:defRPr sz="1400" b="1">
+              <a:defRPr sz="1300" b="1">
                 <a:solidFill>
                   <a:srgbClr val="FFFFFF"/>
                 </a:solidFill>
-                <a:latin typeface="Calibri"/>
+                <a:latin typeface="Consolas"/>
               </a:defRPr>
             </a:pPr>
             <a:r>
@@ -3755,44 +4463,8 @@
         </p:nvSpPr>
         <p:spPr>
           <a:xfrm>
-            <a:off x="3017520" y="320040"/>
-            <a:ext cx="8229600" cy="731520"/>
-          </a:xfrm>
-          <a:prstGeom prst="rect">
-            <a:avLst/>
-          </a:prstGeom>
-          <a:noFill/>
-        </p:spPr>
-        <p:txBody>
-          <a:bodyPr wrap="none">
-            <a:spAutoFit/>
-          </a:bodyPr>
-          <a:lstStyle/>
-          <a:p>
-            <a:pPr>
-              <a:defRPr sz="3000" b="1">
-                <a:solidFill>
-                  <a:srgbClr val="222222"/>
-                </a:solidFill>
-                <a:latin typeface="Calibri"/>
-              </a:defRPr>
-            </a:pPr>
-            <a:r>
-              <a:t>Exercise 1: Explore doe-helper</a:t>
-            </a:r>
-          </a:p>
-        </p:txBody>
-      </p:sp>
-      <p:sp>
-        <p:nvSpPr>
-          <p:cNvPr id="5" name="TextBox 4"/>
-          <p:cNvSpPr txBox="1"/>
-          <p:nvPr/>
-        </p:nvSpPr>
-        <p:spPr>
-          <a:xfrm>
-            <a:off x="914400" y="1371600"/>
-            <a:ext cx="10058400" cy="5029200"/>
+            <a:off x="3017520" y="274320"/>
+            <a:ext cx="8229600" cy="548640"/>
           </a:xfrm>
           <a:prstGeom prst="rect">
             <a:avLst/>
@@ -3805,128 +4477,302 @@
           </a:bodyPr>
           <a:lstStyle/>
           <a:p>
+            <a:pPr algn="l">
+              <a:defRPr sz="2600" b="1">
+                <a:solidFill>
+                  <a:srgbClr val="111111"/>
+                </a:solidFill>
+                <a:latin typeface="Inter"/>
+              </a:defRPr>
+            </a:pPr>
+            <a:r>
+              <a:t>Exercise 1: Explore doe-helper</a:t>
+            </a:r>
+          </a:p>
+        </p:txBody>
+      </p:sp>
+      <p:sp>
+        <p:nvSpPr>
+          <p:cNvPr id="5" name="Rounded Rectangle 4"/>
+          <p:cNvSpPr/>
+          <p:nvPr/>
+        </p:nvSpPr>
+        <p:spPr>
+          <a:xfrm>
+            <a:off x="548640" y="1005840"/>
+            <a:ext cx="10972800" cy="5120640"/>
+          </a:xfrm>
+          <a:prstGeom prst="roundRect">
+            <a:avLst/>
+          </a:prstGeom>
+          <a:solidFill>
+            <a:srgbClr val="FFFBEB"/>
+          </a:solidFill>
+          <a:ln>
+            <a:noFill/>
+          </a:ln>
+        </p:spPr>
+        <p:style>
+          <a:lnRef idx="1">
+            <a:schemeClr val="accent1"/>
+          </a:lnRef>
+          <a:fillRef idx="3">
+            <a:schemeClr val="accent1"/>
+          </a:fillRef>
+          <a:effectRef idx="2">
+            <a:schemeClr val="accent1"/>
+          </a:effectRef>
+          <a:fontRef idx="minor">
+            <a:schemeClr val="lt1"/>
+          </a:fontRef>
+        </p:style>
+        <p:txBody>
+          <a:bodyPr rtlCol="0" anchor="ctr"/>
+          <a:lstStyle/>
+          <a:p>
+            <a:pPr algn="ctr"/>
+          </a:p>
+        </p:txBody>
+      </p:sp>
+      <p:sp>
+        <p:nvSpPr>
+          <p:cNvPr id="6" name="Rectangle 5"/>
+          <p:cNvSpPr/>
+          <p:nvPr/>
+        </p:nvSpPr>
+        <p:spPr>
+          <a:xfrm>
+            <a:off x="548640" y="1005840"/>
+            <a:ext cx="36576" cy="5120640"/>
+          </a:xfrm>
+          <a:prstGeom prst="rect">
+            <a:avLst/>
+          </a:prstGeom>
+          <a:solidFill>
+            <a:srgbClr val="D97706"/>
+          </a:solidFill>
+          <a:ln>
+            <a:noFill/>
+          </a:ln>
+        </p:spPr>
+        <p:style>
+          <a:lnRef idx="1">
+            <a:schemeClr val="accent1"/>
+          </a:lnRef>
+          <a:fillRef idx="3">
+            <a:schemeClr val="accent1"/>
+          </a:fillRef>
+          <a:effectRef idx="2">
+            <a:schemeClr val="accent1"/>
+          </a:effectRef>
+          <a:fontRef idx="minor">
+            <a:schemeClr val="lt1"/>
+          </a:fontRef>
+        </p:style>
+        <p:txBody>
+          <a:bodyPr rtlCol="0" anchor="ctr"/>
+          <a:lstStyle/>
+          <a:p>
+            <a:pPr algn="ctr"/>
+          </a:p>
+        </p:txBody>
+      </p:sp>
+      <p:sp>
+        <p:nvSpPr>
+          <p:cNvPr id="7" name="TextBox 6"/>
+          <p:cNvSpPr txBox="1"/>
+          <p:nvPr/>
+        </p:nvSpPr>
+        <p:spPr>
+          <a:xfrm>
+            <a:off x="822960" y="1143000"/>
+            <a:ext cx="10424160" cy="4846320"/>
+          </a:xfrm>
+          <a:prstGeom prst="rect">
+            <a:avLst/>
+          </a:prstGeom>
+          <a:noFill/>
+        </p:spPr>
+        <p:txBody>
+          <a:bodyPr wrap="square">
+            <a:spAutoFit/>
+          </a:bodyPr>
+          <a:lstStyle/>
+          <a:p>
             <a:pPr>
               <a:spcAft>
-                <a:spcPts val="600"/>
+                <a:spcPts val="500"/>
               </a:spcAft>
-              <a:defRPr sz="2000">
-                <a:solidFill>
-                  <a:srgbClr val="222222"/>
-                </a:solidFill>
-                <a:latin typeface="Calibri"/>
-              </a:defRPr>
-            </a:pPr>
-            <a:r>
-              <a:t>1. Install doe-helper: pip install doehelper</a:t>
+              <a:defRPr sz="1700">
+                <a:solidFill>
+                  <a:srgbClr val="333333"/>
+                </a:solidFill>
+                <a:latin typeface="Inter"/>
+              </a:defRPr>
+            </a:pPr>
+            <a:r>
+              <a:t>1. Install doe-helper:  pip install doehelper</a:t>
             </a:r>
           </a:p>
           <a:p>
             <a:pPr>
               <a:spcAft>
-                <a:spcPts val="600"/>
+                <a:spcPts val="500"/>
               </a:spcAft>
-              <a:defRPr sz="2000">
-                <a:solidFill>
-                  <a:srgbClr val="222222"/>
-                </a:solidFill>
-                <a:latin typeface="Calibri"/>
-              </a:defRPr>
-            </a:pPr>
-            <a:r>
-              <a:t>2. Run: doe --help  and read the available commands</a:t>
+              <a:defRPr sz="1700">
+                <a:solidFill>
+                  <a:srgbClr val="333333"/>
+                </a:solidFill>
+                <a:latin typeface="Inter"/>
+              </a:defRPr>
+            </a:pPr>
+            <a:r>
+              <a:t>2. Run:  doe --help   and read the available commands</a:t>
             </a:r>
           </a:p>
           <a:p>
             <a:pPr>
               <a:spcAft>
-                <a:spcPts val="600"/>
+                <a:spcPts val="500"/>
               </a:spcAft>
-              <a:defRPr sz="2000">
-                <a:solidFill>
-                  <a:srgbClr val="222222"/>
-                </a:solidFill>
-                <a:latin typeface="Calibri"/>
-              </a:defRPr>
-            </a:pPr>
-            <a:r>
-              <a:t>3. Run: doe init coffee_brewing --design full_factorial</a:t>
+              <a:defRPr sz="1700">
+                <a:solidFill>
+                  <a:srgbClr val="333333"/>
+                </a:solidFill>
+                <a:latin typeface="Inter"/>
+              </a:defRPr>
+            </a:pPr>
+            <a:r>
+              <a:t>3. Run:  doe init coffee_brewing --design full_factorial</a:t>
             </a:r>
           </a:p>
           <a:p>
             <a:pPr>
               <a:spcAft>
-                <a:spcPts val="600"/>
+                <a:spcPts val="500"/>
               </a:spcAft>
-              <a:defRPr sz="2000">
-                <a:solidFill>
-                  <a:srgbClr val="222222"/>
-                </a:solidFill>
-                <a:latin typeface="Calibri"/>
-              </a:defRPr>
-            </a:pPr>
-            <a:r>
-              <a:t>4. Open coffee_brewing/config.json and examine the template</a:t>
+              <a:defRPr sz="1700">
+                <a:solidFill>
+                  <a:srgbClr val="333333"/>
+                </a:solidFill>
+                <a:latin typeface="Inter"/>
+              </a:defRPr>
+            </a:pPr>
+            <a:r>
+              <a:t>4. Open  coffee_brewing/config.json  and examine the template</a:t>
             </a:r>
           </a:p>
           <a:p>
             <a:pPr>
               <a:spcAft>
-                <a:spcPts val="600"/>
+                <a:spcPts val="500"/>
               </a:spcAft>
-              <a:defRPr sz="2000">
-                <a:solidFill>
-                  <a:srgbClr val="222222"/>
-                </a:solidFill>
-                <a:latin typeface="Calibri"/>
-              </a:defRPr>
-            </a:pPr>
-            <a:r>
-              <a:t>5. Discussion: identify the factors, levels, and responses</a:t>
+              <a:defRPr sz="1700">
+                <a:solidFill>
+                  <a:srgbClr val="333333"/>
+                </a:solidFill>
+                <a:latin typeface="Inter"/>
+              </a:defRPr>
+            </a:pPr>
+            <a:r>
+              <a:t>5. Identify the factors, levels, and responses</a:t>
             </a:r>
           </a:p>
           <a:p>
             <a:pPr>
               <a:spcAft>
-                <a:spcPts val="600"/>
+                <a:spcPts val="500"/>
               </a:spcAft>
-              <a:defRPr sz="2000">
-                <a:solidFill>
-                  <a:srgbClr val="222222"/>
-                </a:solidFill>
-                <a:latin typeface="Calibri"/>
+              <a:defRPr sz="1700">
+                <a:solidFill>
+                  <a:srgbClr val="333333"/>
+                </a:solidFill>
+                <a:latin typeface="Inter"/>
               </a:defRPr>
             </a:pPr>
           </a:p>
           <a:p>
             <a:pPr>
               <a:spcAft>
-                <a:spcPts val="600"/>
+                <a:spcPts val="500"/>
               </a:spcAft>
-              <a:defRPr sz="2000">
-                <a:solidFill>
-                  <a:srgbClr val="222222"/>
-                </a:solidFill>
-                <a:latin typeface="Calibri"/>
-              </a:defRPr>
-            </a:pPr>
-            <a:r>
-              <a:t>Bonus: Think of a problem in your own work where OVAT has been used.</a:t>
+              <a:defRPr sz="1700">
+                <a:solidFill>
+                  <a:srgbClr val="333333"/>
+                </a:solidFill>
+                <a:latin typeface="Inter"/>
+              </a:defRPr>
+            </a:pPr>
+            <a:r>
+              <a:t>Bonus: Think of a problem in your own work where OVAT</a:t>
             </a:r>
           </a:p>
           <a:p>
             <a:pPr>
               <a:spcAft>
-                <a:spcPts val="600"/>
+                <a:spcPts val="500"/>
               </a:spcAft>
-              <a:defRPr sz="2000">
-                <a:solidFill>
-                  <a:srgbClr val="222222"/>
-                </a:solidFill>
-                <a:latin typeface="Calibri"/>
-              </a:defRPr>
-            </a:pPr>
-            <a:r>
-              <a:t>How many factors and levels would a proper DOE need?</a:t>
+              <a:defRPr sz="1700">
+                <a:solidFill>
+                  <a:srgbClr val="333333"/>
+                </a:solidFill>
+                <a:latin typeface="Inter"/>
+              </a:defRPr>
+            </a:pPr>
+            <a:r>
+              <a:t>has been used. How many factors and levels would a</a:t>
+            </a:r>
+          </a:p>
+          <a:p>
+            <a:pPr>
+              <a:spcAft>
+                <a:spcPts val="500"/>
+              </a:spcAft>
+              <a:defRPr sz="1700">
+                <a:solidFill>
+                  <a:srgbClr val="333333"/>
+                </a:solidFill>
+                <a:latin typeface="Inter"/>
+              </a:defRPr>
+            </a:pPr>
+            <a:r>
+              <a:t>proper DOE need?</a:t>
+            </a:r>
+          </a:p>
+        </p:txBody>
+      </p:sp>
+      <p:sp>
+        <p:nvSpPr>
+          <p:cNvPr id="8" name="TextBox 7"/>
+          <p:cNvSpPr txBox="1"/>
+          <p:nvPr/>
+        </p:nvSpPr>
+        <p:spPr>
+          <a:xfrm>
+            <a:off x="731520" y="6400800"/>
+            <a:ext cx="10058400" cy="365760"/>
+          </a:xfrm>
+          <a:prstGeom prst="rect">
+            <a:avLst/>
+          </a:prstGeom>
+          <a:noFill/>
+        </p:spPr>
+        <p:txBody>
+          <a:bodyPr wrap="square">
+            <a:spAutoFit/>
+          </a:bodyPr>
+          <a:lstStyle/>
+          <a:p>
+            <a:pPr algn="l">
+              <a:defRPr sz="1000" b="0">
+                <a:solidFill>
+                  <a:srgbClr val="999999"/>
+                </a:solidFill>
+                <a:latin typeface="Consolas"/>
+              </a:defRPr>
+            </a:pPr>
+            <a:r>
+              <a:t>© 2026 Martin J. Gallagher  |  GPL-3.0-or-later  |  doehelper.com</a:t>
             </a:r>
           </a:p>
         </p:txBody>
@@ -3945,7 +4791,7 @@
     <p:bg>
       <p:bgPr>
         <a:solidFill>
-          <a:srgbClr val="FFFFFF"/>
+          <a:srgbClr val="FAFAFA"/>
         </a:solidFill>
         <a:effectLst/>
       </p:bgPr>
@@ -3966,13 +4812,13 @@
         <p:spPr>
           <a:xfrm>
             <a:off x="0" y="0"/>
-            <a:ext cx="12191695" cy="54864"/>
+            <a:ext cx="12191695" cy="45720"/>
           </a:xfrm>
           <a:prstGeom prst="rect">
             <a:avLst/>
           </a:prstGeom>
           <a:solidFill>
-            <a:srgbClr val="007BFF"/>
+            <a:srgbClr val="5046E5"/>
           </a:solidFill>
           <a:ln>
             <a:noFill/>
@@ -4002,14 +4848,57 @@
       </p:sp>
       <p:sp>
         <p:nvSpPr>
-          <p:cNvPr id="3" name="TextBox 2"/>
+          <p:cNvPr id="3" name="Rectangle 2"/>
+          <p:cNvSpPr/>
+          <p:nvPr/>
+        </p:nvSpPr>
+        <p:spPr>
+          <a:xfrm>
+            <a:off x="548640" y="411480"/>
+            <a:ext cx="36576" cy="502920"/>
+          </a:xfrm>
+          <a:prstGeom prst="rect">
+            <a:avLst/>
+          </a:prstGeom>
+          <a:solidFill>
+            <a:srgbClr val="5046E5"/>
+          </a:solidFill>
+          <a:ln>
+            <a:noFill/>
+          </a:ln>
+        </p:spPr>
+        <p:style>
+          <a:lnRef idx="1">
+            <a:schemeClr val="accent1"/>
+          </a:lnRef>
+          <a:fillRef idx="3">
+            <a:schemeClr val="accent1"/>
+          </a:fillRef>
+          <a:effectRef idx="2">
+            <a:schemeClr val="accent1"/>
+          </a:effectRef>
+          <a:fontRef idx="minor">
+            <a:schemeClr val="lt1"/>
+          </a:fontRef>
+        </p:style>
+        <p:txBody>
+          <a:bodyPr rtlCol="0" anchor="ctr"/>
+          <a:lstStyle/>
+          <a:p>
+            <a:pPr algn="ctr"/>
+          </a:p>
+        </p:txBody>
+      </p:sp>
+      <p:sp>
+        <p:nvSpPr>
+          <p:cNvPr id="4" name="TextBox 3"/>
           <p:cNvSpPr txBox="1"/>
           <p:nvPr/>
         </p:nvSpPr>
         <p:spPr>
           <a:xfrm>
-            <a:off x="731520" y="365760"/>
-            <a:ext cx="10515600" cy="822960"/>
+            <a:off x="777240" y="365760"/>
+            <a:ext cx="10058400" cy="640080"/>
           </a:xfrm>
           <a:prstGeom prst="rect">
             <a:avLst/>
@@ -4022,12 +4911,12 @@
           </a:bodyPr>
           <a:lstStyle/>
           <a:p>
-            <a:pPr>
-              <a:defRPr sz="3200" b="1">
-                <a:solidFill>
-                  <a:srgbClr val="222222"/>
-                </a:solidFill>
-                <a:latin typeface="Calibri"/>
+            <a:pPr algn="l">
+              <a:defRPr sz="2800" b="1">
+                <a:solidFill>
+                  <a:srgbClr val="111111"/>
+                </a:solidFill>
+                <a:latin typeface="Inter"/>
               </a:defRPr>
             </a:pPr>
             <a:r>
@@ -4038,14 +4927,14 @@
       </p:sp>
       <p:sp>
         <p:nvSpPr>
-          <p:cNvPr id="4" name="TextBox 3"/>
+          <p:cNvPr id="5" name="TextBox 4"/>
           <p:cNvSpPr txBox="1"/>
           <p:nvPr/>
         </p:nvSpPr>
         <p:spPr>
           <a:xfrm>
-            <a:off x="914400" y="1463040"/>
-            <a:ext cx="10058400" cy="4754880"/>
+            <a:off x="822960" y="1188720"/>
+            <a:ext cx="10241280" cy="5120640"/>
           </a:xfrm>
           <a:prstGeom prst="rect">
             <a:avLst/>
@@ -4060,13 +4949,13 @@
           <a:p>
             <a:pPr>
               <a:spcAft>
-                <a:spcPts val="800"/>
+                <a:spcPts val="600"/>
               </a:spcAft>
-              <a:defRPr sz="2200" b="0">
-                <a:solidFill>
-                  <a:srgbClr val="222222"/>
-                </a:solidFill>
-                <a:latin typeface="Calibri"/>
+              <a:defRPr sz="1900">
+                <a:solidFill>
+                  <a:srgbClr val="333333"/>
+                </a:solidFill>
+                <a:latin typeface="Inter"/>
               </a:defRPr>
             </a:pPr>
             <a:r>
@@ -4076,13 +4965,13 @@
           <a:p>
             <a:pPr>
               <a:spcAft>
-                <a:spcPts val="800"/>
+                <a:spcPts val="600"/>
               </a:spcAft>
-              <a:defRPr sz="2200" b="0">
-                <a:solidFill>
-                  <a:srgbClr val="222222"/>
-                </a:solidFill>
-                <a:latin typeface="Calibri"/>
+              <a:defRPr sz="1900">
+                <a:solidFill>
+                  <a:srgbClr val="333333"/>
+                </a:solidFill>
+                <a:latin typeface="Inter"/>
               </a:defRPr>
             </a:pPr>
             <a:r>
@@ -4092,13 +4981,13 @@
           <a:p>
             <a:pPr>
               <a:spcAft>
-                <a:spcPts val="800"/>
+                <a:spcPts val="600"/>
               </a:spcAft>
-              <a:defRPr sz="2200" b="0">
-                <a:solidFill>
-                  <a:srgbClr val="222222"/>
-                </a:solidFill>
-                <a:latin typeface="Calibri"/>
+              <a:defRPr sz="1900">
+                <a:solidFill>
+                  <a:srgbClr val="333333"/>
+                </a:solidFill>
+                <a:latin typeface="Inter"/>
               </a:defRPr>
             </a:pPr>
             <a:r>
@@ -4108,13 +4997,13 @@
           <a:p>
             <a:pPr>
               <a:spcAft>
-                <a:spcPts val="800"/>
+                <a:spcPts val="600"/>
               </a:spcAft>
-              <a:defRPr sz="2200" b="0">
-                <a:solidFill>
-                  <a:srgbClr val="222222"/>
-                </a:solidFill>
-                <a:latin typeface="Calibri"/>
+              <a:defRPr sz="1900">
+                <a:solidFill>
+                  <a:srgbClr val="333333"/>
+                </a:solidFill>
+                <a:latin typeface="Inter"/>
               </a:defRPr>
             </a:pPr>
             <a:r>
@@ -4124,13 +5013,13 @@
           <a:p>
             <a:pPr>
               <a:spcAft>
-                <a:spcPts val="800"/>
+                <a:spcPts val="600"/>
               </a:spcAft>
-              <a:defRPr sz="2200" b="0">
-                <a:solidFill>
-                  <a:srgbClr val="222222"/>
-                </a:solidFill>
-                <a:latin typeface="Calibri"/>
+              <a:defRPr sz="1900">
+                <a:solidFill>
+                  <a:srgbClr val="333333"/>
+                </a:solidFill>
+                <a:latin typeface="Inter"/>
               </a:defRPr>
             </a:pPr>
             <a:r>
@@ -4140,17 +5029,53 @@
           <a:p>
             <a:pPr>
               <a:spcAft>
-                <a:spcPts val="800"/>
+                <a:spcPts val="600"/>
               </a:spcAft>
-              <a:defRPr sz="2200" b="0">
-                <a:solidFill>
-                  <a:srgbClr val="222222"/>
-                </a:solidFill>
-                <a:latin typeface="Calibri"/>
+              <a:defRPr sz="1900">
+                <a:solidFill>
+                  <a:srgbClr val="333333"/>
+                </a:solidFill>
+                <a:latin typeface="Inter"/>
               </a:defRPr>
             </a:pPr>
             <a:r>
               <a:t>When to use DOE vs. other approaches</a:t>
+            </a:r>
+          </a:p>
+        </p:txBody>
+      </p:sp>
+      <p:sp>
+        <p:nvSpPr>
+          <p:cNvPr id="6" name="TextBox 5"/>
+          <p:cNvSpPr txBox="1"/>
+          <p:nvPr/>
+        </p:nvSpPr>
+        <p:spPr>
+          <a:xfrm>
+            <a:off x="731520" y="6400800"/>
+            <a:ext cx="10058400" cy="365760"/>
+          </a:xfrm>
+          <a:prstGeom prst="rect">
+            <a:avLst/>
+          </a:prstGeom>
+          <a:noFill/>
+        </p:spPr>
+        <p:txBody>
+          <a:bodyPr wrap="square">
+            <a:spAutoFit/>
+          </a:bodyPr>
+          <a:lstStyle/>
+          <a:p>
+            <a:pPr algn="l">
+              <a:defRPr sz="1000" b="0">
+                <a:solidFill>
+                  <a:srgbClr val="999999"/>
+                </a:solidFill>
+                <a:latin typeface="Consolas"/>
+              </a:defRPr>
+            </a:pPr>
+            <a:r>
+              <a:t>© 2026 Martin J. Gallagher  |  GPL-3.0-or-later  |  doehelper.com</a:t>
             </a:r>
           </a:p>
         </p:txBody>
@@ -4169,7 +5094,7 @@
     <p:bg>
       <p:bgPr>
         <a:solidFill>
-          <a:srgbClr val="FFFFFF"/>
+          <a:srgbClr val="FAFAFA"/>
         </a:solidFill>
         <a:effectLst/>
       </p:bgPr>
@@ -4190,13 +5115,13 @@
         <p:spPr>
           <a:xfrm>
             <a:off x="0" y="0"/>
-            <a:ext cx="12191695" cy="54864"/>
+            <a:ext cx="12191695" cy="45720"/>
           </a:xfrm>
           <a:prstGeom prst="rect">
             <a:avLst/>
           </a:prstGeom>
           <a:solidFill>
-            <a:srgbClr val="007BFF"/>
+            <a:srgbClr val="5046E5"/>
           </a:solidFill>
           <a:ln>
             <a:noFill/>
@@ -4226,14 +5151,57 @@
       </p:sp>
       <p:sp>
         <p:nvSpPr>
-          <p:cNvPr id="3" name="TextBox 2"/>
+          <p:cNvPr id="3" name="Rectangle 2"/>
+          <p:cNvSpPr/>
+          <p:nvPr/>
+        </p:nvSpPr>
+        <p:spPr>
+          <a:xfrm>
+            <a:off x="548640" y="411480"/>
+            <a:ext cx="36576" cy="502920"/>
+          </a:xfrm>
+          <a:prstGeom prst="rect">
+            <a:avLst/>
+          </a:prstGeom>
+          <a:solidFill>
+            <a:srgbClr val="5046E5"/>
+          </a:solidFill>
+          <a:ln>
+            <a:noFill/>
+          </a:ln>
+        </p:spPr>
+        <p:style>
+          <a:lnRef idx="1">
+            <a:schemeClr val="accent1"/>
+          </a:lnRef>
+          <a:fillRef idx="3">
+            <a:schemeClr val="accent1"/>
+          </a:fillRef>
+          <a:effectRef idx="2">
+            <a:schemeClr val="accent1"/>
+          </a:effectRef>
+          <a:fontRef idx="minor">
+            <a:schemeClr val="lt1"/>
+          </a:fontRef>
+        </p:style>
+        <p:txBody>
+          <a:bodyPr rtlCol="0" anchor="ctr"/>
+          <a:lstStyle/>
+          <a:p>
+            <a:pPr algn="ctr"/>
+          </a:p>
+        </p:txBody>
+      </p:sp>
+      <p:sp>
+        <p:nvSpPr>
+          <p:cNvPr id="4" name="TextBox 3"/>
           <p:cNvSpPr txBox="1"/>
           <p:nvPr/>
         </p:nvSpPr>
         <p:spPr>
           <a:xfrm>
-            <a:off x="731520" y="365760"/>
-            <a:ext cx="10515600" cy="822960"/>
+            <a:off x="777240" y="365760"/>
+            <a:ext cx="10058400" cy="640080"/>
           </a:xfrm>
           <a:prstGeom prst="rect">
             <a:avLst/>
@@ -4246,12 +5214,12 @@
           </a:bodyPr>
           <a:lstStyle/>
           <a:p>
-            <a:pPr>
-              <a:defRPr sz="3200" b="1">
-                <a:solidFill>
-                  <a:srgbClr val="222222"/>
-                </a:solidFill>
-                <a:latin typeface="Calibri"/>
+            <a:pPr algn="l">
+              <a:defRPr sz="2800" b="1">
+                <a:solidFill>
+                  <a:srgbClr val="111111"/>
+                </a:solidFill>
+                <a:latin typeface="Inter"/>
               </a:defRPr>
             </a:pPr>
             <a:r>
@@ -4262,14 +5230,14 @@
       </p:sp>
       <p:sp>
         <p:nvSpPr>
-          <p:cNvPr id="4" name="TextBox 3"/>
+          <p:cNvPr id="5" name="TextBox 4"/>
           <p:cNvSpPr txBox="1"/>
           <p:nvPr/>
         </p:nvSpPr>
         <p:spPr>
           <a:xfrm>
-            <a:off x="914400" y="1463040"/>
-            <a:ext cx="10058400" cy="4754880"/>
+            <a:off x="822960" y="1188720"/>
+            <a:ext cx="10241280" cy="5120640"/>
           </a:xfrm>
           <a:prstGeom prst="rect">
             <a:avLst/>
@@ -4284,13 +5252,13 @@
           <a:p>
             <a:pPr>
               <a:spcAft>
-                <a:spcPts val="800"/>
+                <a:spcPts val="600"/>
               </a:spcAft>
-              <a:defRPr sz="2200" b="0">
-                <a:solidFill>
-                  <a:srgbClr val="222222"/>
-                </a:solidFill>
-                <a:latin typeface="Calibri"/>
+              <a:defRPr sz="1900">
+                <a:solidFill>
+                  <a:srgbClr val="333333"/>
+                </a:solidFill>
+                <a:latin typeface="Inter"/>
               </a:defRPr>
             </a:pPr>
             <a:r>
@@ -4300,97 +5268,133 @@
           <a:p>
             <a:pPr lvl="1">
               <a:spcAft>
-                <a:spcPts val="800"/>
+                <a:spcPts val="600"/>
+              </a:spcAft>
+              <a:defRPr sz="1700">
+                <a:solidFill>
+                  <a:srgbClr val="666666"/>
+                </a:solidFill>
+                <a:latin typeface="Inter"/>
+              </a:defRPr>
+            </a:pPr>
+            <a:r>
+              <a:t>Change multiple factors simultaneously</a:t>
+            </a:r>
+          </a:p>
+          <a:p>
+            <a:pPr lvl="1">
+              <a:spcAft>
+                <a:spcPts val="600"/>
+              </a:spcAft>
+              <a:defRPr sz="1700">
+                <a:solidFill>
+                  <a:srgbClr val="666666"/>
+                </a:solidFill>
+                <a:latin typeface="Inter"/>
+              </a:defRPr>
+            </a:pPr>
+            <a:r>
+              <a:t>Use statistical principles to extract maximum information</a:t>
+            </a:r>
+          </a:p>
+          <a:p>
+            <a:pPr lvl="1">
+              <a:spcAft>
+                <a:spcPts val="600"/>
+              </a:spcAft>
+              <a:defRPr sz="1700">
+                <a:solidFill>
+                  <a:srgbClr val="666666"/>
+                </a:solidFill>
+                <a:latin typeface="Inter"/>
+              </a:defRPr>
+            </a:pPr>
+            <a:r>
+              <a:t>Minimise the number of experimental runs needed</a:t>
+            </a:r>
+          </a:p>
+          <a:p>
+            <a:pPr>
+              <a:spcAft>
+                <a:spcPts val="600"/>
               </a:spcAft>
               <a:defRPr sz="1900">
                 <a:solidFill>
-                  <a:srgbClr val="222222"/>
-                </a:solidFill>
-                <a:latin typeface="Calibri"/>
-              </a:defRPr>
-            </a:pPr>
-            <a:r>
-              <a:t>Change multiple factors simultaneously</a:t>
-            </a:r>
-          </a:p>
-          <a:p>
-            <a:pPr lvl="1">
+                  <a:srgbClr val="333333"/>
+                </a:solidFill>
+                <a:latin typeface="Inter"/>
+              </a:defRPr>
+            </a:pPr>
+            <a:r>
+              <a:t>Pioneered by R.A. Fisher in the 1920s for agriculture</a:t>
+            </a:r>
+          </a:p>
+          <a:p>
+            <a:pPr>
               <a:spcAft>
-                <a:spcPts val="800"/>
+                <a:spcPts val="600"/>
               </a:spcAft>
               <a:defRPr sz="1900">
                 <a:solidFill>
-                  <a:srgbClr val="222222"/>
-                </a:solidFill>
-                <a:latin typeface="Calibri"/>
-              </a:defRPr>
-            </a:pPr>
-            <a:r>
-              <a:t>Use statistical principles to extract maximum information</a:t>
-            </a:r>
-          </a:p>
-          <a:p>
-            <a:pPr lvl="1">
+                  <a:srgbClr val="333333"/>
+                </a:solidFill>
+                <a:latin typeface="Inter"/>
+              </a:defRPr>
+            </a:pPr>
+            <a:r>
+              <a:t>Extended by Taguchi, Box, and others for industry</a:t>
+            </a:r>
+          </a:p>
+          <a:p>
+            <a:pPr>
               <a:spcAft>
-                <a:spcPts val="800"/>
+                <a:spcPts val="600"/>
               </a:spcAft>
               <a:defRPr sz="1900">
                 <a:solidFill>
-                  <a:srgbClr val="222222"/>
-                </a:solidFill>
-                <a:latin typeface="Calibri"/>
-              </a:defRPr>
-            </a:pPr>
-            <a:r>
-              <a:t>Minimize the number of experimental runs needed</a:t>
-            </a:r>
-          </a:p>
-          <a:p>
-            <a:pPr>
-              <a:spcAft>
-                <a:spcPts val="800"/>
-              </a:spcAft>
-              <a:defRPr sz="2200" b="0">
-                <a:solidFill>
-                  <a:srgbClr val="222222"/>
-                </a:solidFill>
-                <a:latin typeface="Calibri"/>
-              </a:defRPr>
-            </a:pPr>
-            <a:r>
-              <a:t>Pioneered by R.A. Fisher in the 1920s for agriculture</a:t>
-            </a:r>
-          </a:p>
-          <a:p>
-            <a:pPr>
-              <a:spcAft>
-                <a:spcPts val="800"/>
-              </a:spcAft>
-              <a:defRPr sz="2200" b="0">
-                <a:solidFill>
-                  <a:srgbClr val="222222"/>
-                </a:solidFill>
-                <a:latin typeface="Calibri"/>
-              </a:defRPr>
-            </a:pPr>
-            <a:r>
-              <a:t>Extended by Taguchi, Box, and others for industry</a:t>
-            </a:r>
-          </a:p>
-          <a:p>
-            <a:pPr>
-              <a:spcAft>
-                <a:spcPts val="800"/>
-              </a:spcAft>
-              <a:defRPr sz="2200" b="0">
-                <a:solidFill>
-                  <a:srgbClr val="222222"/>
-                </a:solidFill>
-                <a:latin typeface="Calibri"/>
+                  <a:srgbClr val="333333"/>
+                </a:solidFill>
+                <a:latin typeface="Inter"/>
               </a:defRPr>
             </a:pPr>
             <a:r>
               <a:t>Now applied to software, cloud, manufacturing, and beyond</a:t>
+            </a:r>
+          </a:p>
+        </p:txBody>
+      </p:sp>
+      <p:sp>
+        <p:nvSpPr>
+          <p:cNvPr id="6" name="TextBox 5"/>
+          <p:cNvSpPr txBox="1"/>
+          <p:nvPr/>
+        </p:nvSpPr>
+        <p:spPr>
+          <a:xfrm>
+            <a:off x="731520" y="6400800"/>
+            <a:ext cx="10058400" cy="365760"/>
+          </a:xfrm>
+          <a:prstGeom prst="rect">
+            <a:avLst/>
+          </a:prstGeom>
+          <a:noFill/>
+        </p:spPr>
+        <p:txBody>
+          <a:bodyPr wrap="square">
+            <a:spAutoFit/>
+          </a:bodyPr>
+          <a:lstStyle/>
+          <a:p>
+            <a:pPr algn="l">
+              <a:defRPr sz="1000" b="0">
+                <a:solidFill>
+                  <a:srgbClr val="999999"/>
+                </a:solidFill>
+                <a:latin typeface="Consolas"/>
+              </a:defRPr>
+            </a:pPr>
+            <a:r>
+              <a:t>© 2026 Martin J. Gallagher  |  GPL-3.0-or-later  |  doehelper.com</a:t>
             </a:r>
           </a:p>
         </p:txBody>
@@ -4409,7 +5413,7 @@
     <p:bg>
       <p:bgPr>
         <a:solidFill>
-          <a:srgbClr val="FFFFFF"/>
+          <a:srgbClr val="FAFAFA"/>
         </a:solidFill>
         <a:effectLst/>
       </p:bgPr>
@@ -4430,13 +5434,13 @@
         <p:spPr>
           <a:xfrm>
             <a:off x="0" y="0"/>
-            <a:ext cx="12191695" cy="54864"/>
+            <a:ext cx="12191695" cy="45720"/>
           </a:xfrm>
           <a:prstGeom prst="rect">
             <a:avLst/>
           </a:prstGeom>
           <a:solidFill>
-            <a:srgbClr val="007BFF"/>
+            <a:srgbClr val="5046E5"/>
           </a:solidFill>
           <a:ln>
             <a:noFill/>
@@ -4466,37 +5470,44 @@
       </p:sp>
       <p:sp>
         <p:nvSpPr>
-          <p:cNvPr id="3" name="TextBox 2"/>
-          <p:cNvSpPr txBox="1"/>
-          <p:nvPr/>
-        </p:nvSpPr>
-        <p:spPr>
-          <a:xfrm>
-            <a:off x="731520" y="365760"/>
-            <a:ext cx="10515600" cy="822960"/>
+          <p:cNvPr id="3" name="Rectangle 2"/>
+          <p:cNvSpPr/>
+          <p:nvPr/>
+        </p:nvSpPr>
+        <p:spPr>
+          <a:xfrm>
+            <a:off x="548640" y="411480"/>
+            <a:ext cx="36576" cy="502920"/>
           </a:xfrm>
           <a:prstGeom prst="rect">
             <a:avLst/>
           </a:prstGeom>
-          <a:noFill/>
-        </p:spPr>
-        <p:txBody>
-          <a:bodyPr wrap="none">
-            <a:spAutoFit/>
-          </a:bodyPr>
-          <a:lstStyle/>
-          <a:p>
-            <a:pPr>
-              <a:defRPr sz="3200" b="1">
-                <a:solidFill>
-                  <a:srgbClr val="222222"/>
-                </a:solidFill>
-                <a:latin typeface="Calibri"/>
-              </a:defRPr>
-            </a:pPr>
-            <a:r>
-              <a:t>The Cost of Unplanned Experiments</a:t>
-            </a:r>
+          <a:solidFill>
+            <a:srgbClr val="5046E5"/>
+          </a:solidFill>
+          <a:ln>
+            <a:noFill/>
+          </a:ln>
+        </p:spPr>
+        <p:style>
+          <a:lnRef idx="1">
+            <a:schemeClr val="accent1"/>
+          </a:lnRef>
+          <a:fillRef idx="3">
+            <a:schemeClr val="accent1"/>
+          </a:fillRef>
+          <a:effectRef idx="2">
+            <a:schemeClr val="accent1"/>
+          </a:effectRef>
+          <a:fontRef idx="minor">
+            <a:schemeClr val="lt1"/>
+          </a:fontRef>
+        </p:style>
+        <p:txBody>
+          <a:bodyPr rtlCol="0" anchor="ctr"/>
+          <a:lstStyle/>
+          <a:p>
+            <a:pPr algn="ctr"/>
           </a:p>
         </p:txBody>
       </p:sp>
@@ -4508,44 +5519,8 @@
         </p:nvSpPr>
         <p:spPr>
           <a:xfrm>
-            <a:off x="731520" y="1280160"/>
-            <a:ext cx="5029200" cy="457200"/>
-          </a:xfrm>
-          <a:prstGeom prst="rect">
-            <a:avLst/>
-          </a:prstGeom>
-          <a:noFill/>
-        </p:spPr>
-        <p:txBody>
-          <a:bodyPr wrap="none">
-            <a:spAutoFit/>
-          </a:bodyPr>
-          <a:lstStyle/>
-          <a:p>
-            <a:pPr>
-              <a:defRPr sz="2200" b="1">
-                <a:solidFill>
-                  <a:srgbClr val="007BFF"/>
-                </a:solidFill>
-                <a:latin typeface="Calibri"/>
-              </a:defRPr>
-            </a:pPr>
-            <a:r>
-              <a:t>The Problem</a:t>
-            </a:r>
-          </a:p>
-        </p:txBody>
-      </p:sp>
-      <p:sp>
-        <p:nvSpPr>
-          <p:cNvPr id="5" name="TextBox 4"/>
-          <p:cNvSpPr txBox="1"/>
-          <p:nvPr/>
-        </p:nvSpPr>
-        <p:spPr>
-          <a:xfrm>
-            <a:off x="731520" y="1828800"/>
-            <a:ext cx="5029200" cy="4572000"/>
+            <a:off x="777240" y="365760"/>
+            <a:ext cx="10058400" cy="640080"/>
           </a:xfrm>
           <a:prstGeom prst="rect">
             <a:avLst/>
@@ -4558,120 +5533,103 @@
           </a:bodyPr>
           <a:lstStyle/>
           <a:p>
-            <a:pPr>
-              <a:spcAft>
-                <a:spcPts val="600"/>
-              </a:spcAft>
-              <a:defRPr sz="2000">
-                <a:solidFill>
-                  <a:srgbClr val="222222"/>
-                </a:solidFill>
-                <a:latin typeface="Calibri"/>
-              </a:defRPr>
-            </a:pPr>
-            <a:r>
-              <a:t>Ad-hoc testing wastes resources</a:t>
-            </a:r>
-          </a:p>
-          <a:p>
-            <a:pPr>
-              <a:spcAft>
-                <a:spcPts val="600"/>
-              </a:spcAft>
-              <a:defRPr sz="2000">
-                <a:solidFill>
-                  <a:srgbClr val="222222"/>
-                </a:solidFill>
-                <a:latin typeface="Calibri"/>
-              </a:defRPr>
-            </a:pPr>
-            <a:r>
-              <a:t>Interactions between factors are missed</a:t>
-            </a:r>
-          </a:p>
-          <a:p>
-            <a:pPr>
-              <a:spcAft>
-                <a:spcPts val="600"/>
-              </a:spcAft>
-              <a:defRPr sz="2000">
-                <a:solidFill>
-                  <a:srgbClr val="222222"/>
-                </a:solidFill>
-                <a:latin typeface="Calibri"/>
-              </a:defRPr>
-            </a:pPr>
-            <a:r>
-              <a:t>Conclusions drawn from insufficient data</a:t>
-            </a:r>
-          </a:p>
-          <a:p>
-            <a:pPr>
-              <a:spcAft>
-                <a:spcPts val="600"/>
-              </a:spcAft>
-              <a:defRPr sz="2000">
-                <a:solidFill>
-                  <a:srgbClr val="222222"/>
-                </a:solidFill>
-                <a:latin typeface="Calibri"/>
-              </a:defRPr>
-            </a:pPr>
-            <a:r>
-              <a:t>Optimisation gets stuck in local optima</a:t>
-            </a:r>
-          </a:p>
-          <a:p>
-            <a:pPr>
-              <a:spcAft>
-                <a:spcPts val="600"/>
-              </a:spcAft>
-              <a:defRPr sz="2000">
-                <a:solidFill>
-                  <a:srgbClr val="222222"/>
-                </a:solidFill>
-                <a:latin typeface="Calibri"/>
-              </a:defRPr>
-            </a:pPr>
-            <a:r>
-              <a:t>Results are not reproducible</a:t>
-            </a:r>
-          </a:p>
-        </p:txBody>
-      </p:sp>
-      <p:sp>
-        <p:nvSpPr>
-          <p:cNvPr id="6" name="TextBox 5"/>
-          <p:cNvSpPr txBox="1"/>
-          <p:nvPr/>
-        </p:nvSpPr>
-        <p:spPr>
-          <a:xfrm>
-            <a:off x="6400800" y="1280160"/>
-            <a:ext cx="5029200" cy="457200"/>
+            <a:pPr algn="l">
+              <a:defRPr sz="2800" b="1">
+                <a:solidFill>
+                  <a:srgbClr val="111111"/>
+                </a:solidFill>
+                <a:latin typeface="Inter"/>
+              </a:defRPr>
+            </a:pPr>
+            <a:r>
+              <a:t>The Cost of Unplanned Experiments</a:t>
+            </a:r>
+          </a:p>
+        </p:txBody>
+      </p:sp>
+      <p:sp>
+        <p:nvSpPr>
+          <p:cNvPr id="5" name="Rounded Rectangle 4"/>
+          <p:cNvSpPr/>
+          <p:nvPr/>
+        </p:nvSpPr>
+        <p:spPr>
+          <a:xfrm>
+            <a:off x="548640" y="1188720"/>
+            <a:ext cx="5303520" cy="4937760"/>
+          </a:xfrm>
+          <a:prstGeom prst="roundRect">
+            <a:avLst/>
+          </a:prstGeom>
+          <a:solidFill>
+            <a:srgbClr val="F0FDF4"/>
+          </a:solidFill>
+          <a:ln>
+            <a:noFill/>
+          </a:ln>
+        </p:spPr>
+        <p:style>
+          <a:lnRef idx="1">
+            <a:schemeClr val="accent1"/>
+          </a:lnRef>
+          <a:fillRef idx="3">
+            <a:schemeClr val="accent1"/>
+          </a:fillRef>
+          <a:effectRef idx="2">
+            <a:schemeClr val="accent1"/>
+          </a:effectRef>
+          <a:fontRef idx="minor">
+            <a:schemeClr val="lt1"/>
+          </a:fontRef>
+        </p:style>
+        <p:txBody>
+          <a:bodyPr rtlCol="0" anchor="ctr"/>
+          <a:lstStyle/>
+          <a:p>
+            <a:pPr algn="ctr"/>
+          </a:p>
+        </p:txBody>
+      </p:sp>
+      <p:sp>
+        <p:nvSpPr>
+          <p:cNvPr id="6" name="Rectangle 5"/>
+          <p:cNvSpPr/>
+          <p:nvPr/>
+        </p:nvSpPr>
+        <p:spPr>
+          <a:xfrm>
+            <a:off x="548640" y="1188720"/>
+            <a:ext cx="36576" cy="4937760"/>
           </a:xfrm>
           <a:prstGeom prst="rect">
             <a:avLst/>
           </a:prstGeom>
-          <a:noFill/>
-        </p:spPr>
-        <p:txBody>
-          <a:bodyPr wrap="none">
-            <a:spAutoFit/>
-          </a:bodyPr>
-          <a:lstStyle/>
-          <a:p>
-            <a:pPr>
-              <a:defRPr sz="2200" b="1">
-                <a:solidFill>
-                  <a:srgbClr val="00C853"/>
-                </a:solidFill>
-                <a:latin typeface="Calibri"/>
-              </a:defRPr>
-            </a:pPr>
-            <a:r>
-              <a:t>Real-World Example</a:t>
-            </a:r>
+          <a:solidFill>
+            <a:srgbClr val="16A34A"/>
+          </a:solidFill>
+          <a:ln>
+            <a:noFill/>
+          </a:ln>
+        </p:spPr>
+        <p:style>
+          <a:lnRef idx="1">
+            <a:schemeClr val="accent1"/>
+          </a:lnRef>
+          <a:fillRef idx="3">
+            <a:schemeClr val="accent1"/>
+          </a:fillRef>
+          <a:effectRef idx="2">
+            <a:schemeClr val="accent1"/>
+          </a:effectRef>
+          <a:fontRef idx="minor">
+            <a:schemeClr val="lt1"/>
+          </a:fontRef>
+        </p:style>
+        <p:txBody>
+          <a:bodyPr rtlCol="0" anchor="ctr"/>
+          <a:lstStyle/>
+          <a:p>
+            <a:pPr algn="ctr"/>
           </a:p>
         </p:txBody>
       </p:sp>
@@ -4683,8 +5641,8 @@
         </p:nvSpPr>
         <p:spPr>
           <a:xfrm>
-            <a:off x="6400800" y="1828800"/>
-            <a:ext cx="5029200" cy="4572000"/>
+            <a:off x="822960" y="1325880"/>
+            <a:ext cx="4754880" cy="365760"/>
           </a:xfrm>
           <a:prstGeom prst="rect">
             <a:avLst/>
@@ -4697,67 +5655,364 @@
           </a:bodyPr>
           <a:lstStyle/>
           <a:p>
+            <a:pPr algn="l">
+              <a:defRPr sz="1600" b="1">
+                <a:solidFill>
+                  <a:srgbClr val="16A34A"/>
+                </a:solidFill>
+                <a:latin typeface="Consolas"/>
+              </a:defRPr>
+            </a:pPr>
+            <a:r>
+              <a:t>THE PROBLEM</a:t>
+            </a:r>
+          </a:p>
+        </p:txBody>
+      </p:sp>
+      <p:sp>
+        <p:nvSpPr>
+          <p:cNvPr id="8" name="TextBox 7"/>
+          <p:cNvSpPr txBox="1"/>
+          <p:nvPr/>
+        </p:nvSpPr>
+        <p:spPr>
+          <a:xfrm>
+            <a:off x="822960" y="1737360"/>
+            <a:ext cx="4754880" cy="4114800"/>
+          </a:xfrm>
+          <a:prstGeom prst="rect">
+            <a:avLst/>
+          </a:prstGeom>
+          <a:noFill/>
+        </p:spPr>
+        <p:txBody>
+          <a:bodyPr wrap="square">
+            <a:spAutoFit/>
+          </a:bodyPr>
+          <a:lstStyle/>
+          <a:p>
             <a:pPr>
               <a:spcAft>
-                <a:spcPts val="600"/>
+                <a:spcPts val="500"/>
               </a:spcAft>
-              <a:defRPr sz="2000">
-                <a:solidFill>
-                  <a:srgbClr val="222222"/>
-                </a:solidFill>
-                <a:latin typeface="Calibri"/>
-              </a:defRPr>
-            </a:pPr>
-            <a:r>
-              <a:t>A web team ran 47 ad-hoc tests over 3 months</a:t>
+              <a:defRPr sz="1700">
+                <a:solidFill>
+                  <a:srgbClr val="333333"/>
+                </a:solidFill>
+                <a:latin typeface="Inter"/>
+              </a:defRPr>
+            </a:pPr>
+            <a:r>
+              <a:t>Ad-hoc testing wastes resources</a:t>
             </a:r>
           </a:p>
           <a:p>
             <a:pPr>
               <a:spcAft>
-                <a:spcPts val="600"/>
+                <a:spcPts val="500"/>
               </a:spcAft>
-              <a:defRPr sz="2000">
-                <a:solidFill>
-                  <a:srgbClr val="222222"/>
-                </a:solidFill>
-                <a:latin typeface="Calibri"/>
-              </a:defRPr>
-            </a:pPr>
-            <a:r>
-              <a:t>Found: only 2 factors mattered</a:t>
+              <a:defRPr sz="1700">
+                <a:solidFill>
+                  <a:srgbClr val="333333"/>
+                </a:solidFill>
+                <a:latin typeface="Inter"/>
+              </a:defRPr>
+            </a:pPr>
+            <a:r>
+              <a:t>Interactions between factors are missed</a:t>
             </a:r>
           </a:p>
           <a:p>
             <a:pPr>
               <a:spcAft>
-                <a:spcPts val="600"/>
+                <a:spcPts val="500"/>
               </a:spcAft>
-              <a:defRPr sz="2000">
-                <a:solidFill>
-                  <a:srgbClr val="222222"/>
-                </a:solidFill>
-                <a:latin typeface="Calibri"/>
-              </a:defRPr>
-            </a:pPr>
-            <a:r>
-              <a:t>A 2-factor full factorial needed just 4 runs</a:t>
+              <a:defRPr sz="1700">
+                <a:solidFill>
+                  <a:srgbClr val="333333"/>
+                </a:solidFill>
+                <a:latin typeface="Inter"/>
+              </a:defRPr>
+            </a:pPr>
+            <a:r>
+              <a:t>Conclusions drawn from insufficient data</a:t>
             </a:r>
           </a:p>
           <a:p>
             <a:pPr>
               <a:spcAft>
-                <a:spcPts val="600"/>
+                <a:spcPts val="500"/>
               </a:spcAft>
-              <a:defRPr sz="2000">
-                <a:solidFill>
-                  <a:srgbClr val="222222"/>
-                </a:solidFill>
-                <a:latin typeface="Calibri"/>
-              </a:defRPr>
-            </a:pPr>
-            <a:r>
-              <a:t>DOE could have saved 43 runs and 11 weeks</a:t>
+              <a:defRPr sz="1700">
+                <a:solidFill>
+                  <a:srgbClr val="333333"/>
+                </a:solidFill>
+                <a:latin typeface="Inter"/>
+              </a:defRPr>
+            </a:pPr>
+            <a:r>
+              <a:t>Optimisation gets stuck in local optima</a:t>
+            </a:r>
+          </a:p>
+          <a:p>
+            <a:pPr>
+              <a:spcAft>
+                <a:spcPts val="500"/>
+              </a:spcAft>
+              <a:defRPr sz="1700">
+                <a:solidFill>
+                  <a:srgbClr val="333333"/>
+                </a:solidFill>
+                <a:latin typeface="Inter"/>
+              </a:defRPr>
+            </a:pPr>
+            <a:r>
+              <a:t>Results are not reproducible</a:t>
+            </a:r>
+          </a:p>
+        </p:txBody>
+      </p:sp>
+      <p:sp>
+        <p:nvSpPr>
+          <p:cNvPr id="9" name="Rounded Rectangle 8"/>
+          <p:cNvSpPr/>
+          <p:nvPr/>
+        </p:nvSpPr>
+        <p:spPr>
+          <a:xfrm>
+            <a:off x="6217920" y="1188720"/>
+            <a:ext cx="5303520" cy="4937760"/>
+          </a:xfrm>
+          <a:prstGeom prst="roundRect">
+            <a:avLst/>
+          </a:prstGeom>
+          <a:solidFill>
+            <a:srgbClr val="EEF2FF"/>
+          </a:solidFill>
+          <a:ln>
+            <a:noFill/>
+          </a:ln>
+        </p:spPr>
+        <p:style>
+          <a:lnRef idx="1">
+            <a:schemeClr val="accent1"/>
+          </a:lnRef>
+          <a:fillRef idx="3">
+            <a:schemeClr val="accent1"/>
+          </a:fillRef>
+          <a:effectRef idx="2">
+            <a:schemeClr val="accent1"/>
+          </a:effectRef>
+          <a:fontRef idx="minor">
+            <a:schemeClr val="lt1"/>
+          </a:fontRef>
+        </p:style>
+        <p:txBody>
+          <a:bodyPr rtlCol="0" anchor="ctr"/>
+          <a:lstStyle/>
+          <a:p>
+            <a:pPr algn="ctr"/>
+          </a:p>
+        </p:txBody>
+      </p:sp>
+      <p:sp>
+        <p:nvSpPr>
+          <p:cNvPr id="10" name="Rectangle 9"/>
+          <p:cNvSpPr/>
+          <p:nvPr/>
+        </p:nvSpPr>
+        <p:spPr>
+          <a:xfrm>
+            <a:off x="6217920" y="1188720"/>
+            <a:ext cx="36576" cy="4937760"/>
+          </a:xfrm>
+          <a:prstGeom prst="rect">
+            <a:avLst/>
+          </a:prstGeom>
+          <a:solidFill>
+            <a:srgbClr val="5046E5"/>
+          </a:solidFill>
+          <a:ln>
+            <a:noFill/>
+          </a:ln>
+        </p:spPr>
+        <p:style>
+          <a:lnRef idx="1">
+            <a:schemeClr val="accent1"/>
+          </a:lnRef>
+          <a:fillRef idx="3">
+            <a:schemeClr val="accent1"/>
+          </a:fillRef>
+          <a:effectRef idx="2">
+            <a:schemeClr val="accent1"/>
+          </a:effectRef>
+          <a:fontRef idx="minor">
+            <a:schemeClr val="lt1"/>
+          </a:fontRef>
+        </p:style>
+        <p:txBody>
+          <a:bodyPr rtlCol="0" anchor="ctr"/>
+          <a:lstStyle/>
+          <a:p>
+            <a:pPr algn="ctr"/>
+          </a:p>
+        </p:txBody>
+      </p:sp>
+      <p:sp>
+        <p:nvSpPr>
+          <p:cNvPr id="11" name="TextBox 10"/>
+          <p:cNvSpPr txBox="1"/>
+          <p:nvPr/>
+        </p:nvSpPr>
+        <p:spPr>
+          <a:xfrm>
+            <a:off x="6492240" y="1325880"/>
+            <a:ext cx="4754880" cy="365760"/>
+          </a:xfrm>
+          <a:prstGeom prst="rect">
+            <a:avLst/>
+          </a:prstGeom>
+          <a:noFill/>
+        </p:spPr>
+        <p:txBody>
+          <a:bodyPr wrap="square">
+            <a:spAutoFit/>
+          </a:bodyPr>
+          <a:lstStyle/>
+          <a:p>
+            <a:pPr algn="l">
+              <a:defRPr sz="1600" b="1">
+                <a:solidFill>
+                  <a:srgbClr val="5046E5"/>
+                </a:solidFill>
+                <a:latin typeface="Consolas"/>
+              </a:defRPr>
+            </a:pPr>
+            <a:r>
+              <a:t>REAL-WORLD EXAMPLE</a:t>
+            </a:r>
+          </a:p>
+        </p:txBody>
+      </p:sp>
+      <p:sp>
+        <p:nvSpPr>
+          <p:cNvPr id="12" name="TextBox 11"/>
+          <p:cNvSpPr txBox="1"/>
+          <p:nvPr/>
+        </p:nvSpPr>
+        <p:spPr>
+          <a:xfrm>
+            <a:off x="6492240" y="1737360"/>
+            <a:ext cx="4754880" cy="4114800"/>
+          </a:xfrm>
+          <a:prstGeom prst="rect">
+            <a:avLst/>
+          </a:prstGeom>
+          <a:noFill/>
+        </p:spPr>
+        <p:txBody>
+          <a:bodyPr wrap="square">
+            <a:spAutoFit/>
+          </a:bodyPr>
+          <a:lstStyle/>
+          <a:p>
+            <a:pPr>
+              <a:spcAft>
+                <a:spcPts val="500"/>
+              </a:spcAft>
+              <a:defRPr sz="1700">
+                <a:solidFill>
+                  <a:srgbClr val="333333"/>
+                </a:solidFill>
+                <a:latin typeface="Inter"/>
+              </a:defRPr>
+            </a:pPr>
+            <a:r>
+              <a:t>A web team ran 47 ad-hoc tests over 3 months</a:t>
+            </a:r>
+          </a:p>
+          <a:p>
+            <a:pPr>
+              <a:spcAft>
+                <a:spcPts val="500"/>
+              </a:spcAft>
+              <a:defRPr sz="1700">
+                <a:solidFill>
+                  <a:srgbClr val="333333"/>
+                </a:solidFill>
+                <a:latin typeface="Inter"/>
+              </a:defRPr>
+            </a:pPr>
+            <a:r>
+              <a:t>Found: only 2 factors mattered</a:t>
+            </a:r>
+          </a:p>
+          <a:p>
+            <a:pPr>
+              <a:spcAft>
+                <a:spcPts val="500"/>
+              </a:spcAft>
+              <a:defRPr sz="1700">
+                <a:solidFill>
+                  <a:srgbClr val="333333"/>
+                </a:solidFill>
+                <a:latin typeface="Inter"/>
+              </a:defRPr>
+            </a:pPr>
+            <a:r>
+              <a:t>A 2-factor full factorial needed just 4 runs</a:t>
+            </a:r>
+          </a:p>
+          <a:p>
+            <a:pPr>
+              <a:spcAft>
+                <a:spcPts val="500"/>
+              </a:spcAft>
+              <a:defRPr sz="1700">
+                <a:solidFill>
+                  <a:srgbClr val="333333"/>
+                </a:solidFill>
+                <a:latin typeface="Inter"/>
+              </a:defRPr>
+            </a:pPr>
+            <a:r>
+              <a:t>DOE saved 43 runs and 11 weeks</a:t>
+            </a:r>
+          </a:p>
+        </p:txBody>
+      </p:sp>
+      <p:sp>
+        <p:nvSpPr>
+          <p:cNvPr id="13" name="TextBox 12"/>
+          <p:cNvSpPr txBox="1"/>
+          <p:nvPr/>
+        </p:nvSpPr>
+        <p:spPr>
+          <a:xfrm>
+            <a:off x="731520" y="6400800"/>
+            <a:ext cx="10058400" cy="365760"/>
+          </a:xfrm>
+          <a:prstGeom prst="rect">
+            <a:avLst/>
+          </a:prstGeom>
+          <a:noFill/>
+        </p:spPr>
+        <p:txBody>
+          <a:bodyPr wrap="square">
+            <a:spAutoFit/>
+          </a:bodyPr>
+          <a:lstStyle/>
+          <a:p>
+            <a:pPr algn="l">
+              <a:defRPr sz="1000" b="0">
+                <a:solidFill>
+                  <a:srgbClr val="999999"/>
+                </a:solidFill>
+                <a:latin typeface="Consolas"/>
+              </a:defRPr>
+            </a:pPr>
+            <a:r>
+              <a:t>© 2026 Martin J. Gallagher  |  GPL-3.0-or-later  |  doehelper.com</a:t>
             </a:r>
           </a:p>
         </p:txBody>
@@ -4776,7 +6031,7 @@
     <p:bg>
       <p:bgPr>
         <a:solidFill>
-          <a:srgbClr val="FFFFFF"/>
+          <a:srgbClr val="FAFAFA"/>
         </a:solidFill>
         <a:effectLst/>
       </p:bgPr>
@@ -4797,13 +6052,13 @@
         <p:spPr>
           <a:xfrm>
             <a:off x="0" y="0"/>
-            <a:ext cx="12191695" cy="54864"/>
+            <a:ext cx="12191695" cy="45720"/>
           </a:xfrm>
           <a:prstGeom prst="rect">
             <a:avLst/>
           </a:prstGeom>
           <a:solidFill>
-            <a:srgbClr val="007BFF"/>
+            <a:srgbClr val="5046E5"/>
           </a:solidFill>
           <a:ln>
             <a:noFill/>
@@ -4833,14 +6088,57 @@
       </p:sp>
       <p:sp>
         <p:nvSpPr>
-          <p:cNvPr id="3" name="TextBox 2"/>
+          <p:cNvPr id="3" name="Rectangle 2"/>
+          <p:cNvSpPr/>
+          <p:nvPr/>
+        </p:nvSpPr>
+        <p:spPr>
+          <a:xfrm>
+            <a:off x="548640" y="411480"/>
+            <a:ext cx="36576" cy="502920"/>
+          </a:xfrm>
+          <a:prstGeom prst="rect">
+            <a:avLst/>
+          </a:prstGeom>
+          <a:solidFill>
+            <a:srgbClr val="5046E5"/>
+          </a:solidFill>
+          <a:ln>
+            <a:noFill/>
+          </a:ln>
+        </p:spPr>
+        <p:style>
+          <a:lnRef idx="1">
+            <a:schemeClr val="accent1"/>
+          </a:lnRef>
+          <a:fillRef idx="3">
+            <a:schemeClr val="accent1"/>
+          </a:fillRef>
+          <a:effectRef idx="2">
+            <a:schemeClr val="accent1"/>
+          </a:effectRef>
+          <a:fontRef idx="minor">
+            <a:schemeClr val="lt1"/>
+          </a:fontRef>
+        </p:style>
+        <p:txBody>
+          <a:bodyPr rtlCol="0" anchor="ctr"/>
+          <a:lstStyle/>
+          <a:p>
+            <a:pPr algn="ctr"/>
+          </a:p>
+        </p:txBody>
+      </p:sp>
+      <p:sp>
+        <p:nvSpPr>
+          <p:cNvPr id="4" name="TextBox 3"/>
           <p:cNvSpPr txBox="1"/>
           <p:nvPr/>
         </p:nvSpPr>
         <p:spPr>
           <a:xfrm>
-            <a:off x="731520" y="365760"/>
-            <a:ext cx="10515600" cy="822960"/>
+            <a:off x="777240" y="365760"/>
+            <a:ext cx="10058400" cy="640080"/>
           </a:xfrm>
           <a:prstGeom prst="rect">
             <a:avLst/>
@@ -4853,12 +6151,12 @@
           </a:bodyPr>
           <a:lstStyle/>
           <a:p>
-            <a:pPr>
-              <a:defRPr sz="3200" b="1">
-                <a:solidFill>
-                  <a:srgbClr val="222222"/>
-                </a:solidFill>
-                <a:latin typeface="Calibri"/>
+            <a:pPr algn="l">
+              <a:defRPr sz="2800" b="1">
+                <a:solidFill>
+                  <a:srgbClr val="111111"/>
+                </a:solidFill>
+                <a:latin typeface="Inter"/>
               </a:defRPr>
             </a:pPr>
             <a:r>
@@ -4869,14 +6167,14 @@
       </p:sp>
       <p:sp>
         <p:nvSpPr>
-          <p:cNvPr id="4" name="TextBox 3"/>
+          <p:cNvPr id="5" name="TextBox 4"/>
           <p:cNvSpPr txBox="1"/>
           <p:nvPr/>
         </p:nvSpPr>
         <p:spPr>
           <a:xfrm>
-            <a:off x="914400" y="1463040"/>
-            <a:ext cx="10058400" cy="4754880"/>
+            <a:off x="822960" y="1188720"/>
+            <a:ext cx="10241280" cy="5120640"/>
           </a:xfrm>
           <a:prstGeom prst="rect">
             <a:avLst/>
@@ -4891,13 +6189,13 @@
           <a:p>
             <a:pPr>
               <a:spcAft>
-                <a:spcPts val="800"/>
+                <a:spcPts val="600"/>
               </a:spcAft>
-              <a:defRPr sz="2200" b="0">
-                <a:solidFill>
-                  <a:srgbClr val="222222"/>
-                </a:solidFill>
-                <a:latin typeface="Calibri"/>
+              <a:defRPr sz="1900">
+                <a:solidFill>
+                  <a:srgbClr val="333333"/>
+                </a:solidFill>
+                <a:latin typeface="Inter"/>
               </a:defRPr>
             </a:pPr>
             <a:r>
@@ -4907,13 +6205,13 @@
           <a:p>
             <a:pPr>
               <a:spcAft>
-                <a:spcPts val="800"/>
+                <a:spcPts val="600"/>
               </a:spcAft>
-              <a:defRPr sz="2200" b="0">
-                <a:solidFill>
-                  <a:srgbClr val="222222"/>
-                </a:solidFill>
-                <a:latin typeface="Calibri"/>
+              <a:defRPr sz="1900">
+                <a:solidFill>
+                  <a:srgbClr val="333333"/>
+                </a:solidFill>
+                <a:latin typeface="Inter"/>
               </a:defRPr>
             </a:pPr>
             <a:r>
@@ -4923,97 +6221,133 @@
           <a:p>
             <a:pPr lvl="1">
               <a:spcAft>
-                <a:spcPts val="800"/>
+                <a:spcPts val="600"/>
+              </a:spcAft>
+              <a:defRPr sz="1700">
+                <a:solidFill>
+                  <a:srgbClr val="666666"/>
+                </a:solidFill>
+                <a:latin typeface="Inter"/>
+              </a:defRPr>
+            </a:pPr>
+            <a:r>
+              <a:t>Misses interactions between factors entirely</a:t>
+            </a:r>
+          </a:p>
+          <a:p>
+            <a:pPr lvl="1">
+              <a:spcAft>
+                <a:spcPts val="600"/>
+              </a:spcAft>
+              <a:defRPr sz="1700">
+                <a:solidFill>
+                  <a:srgbClr val="666666"/>
+                </a:solidFill>
+                <a:latin typeface="Inter"/>
+              </a:defRPr>
+            </a:pPr>
+            <a:r>
+              <a:t>Requires more runs to learn the same amount</a:t>
+            </a:r>
+          </a:p>
+          <a:p>
+            <a:pPr lvl="1">
+              <a:spcAft>
+                <a:spcPts val="600"/>
+              </a:spcAft>
+              <a:defRPr sz="1700">
+                <a:solidFill>
+                  <a:srgbClr val="666666"/>
+                </a:solidFill>
+                <a:latin typeface="Inter"/>
+              </a:defRPr>
+            </a:pPr>
+            <a:r>
+              <a:t>Can converge on the wrong optimum</a:t>
+            </a:r>
+          </a:p>
+          <a:p>
+            <a:pPr>
+              <a:spcAft>
+                <a:spcPts val="600"/>
               </a:spcAft>
               <a:defRPr sz="1900">
                 <a:solidFill>
-                  <a:srgbClr val="222222"/>
-                </a:solidFill>
-                <a:latin typeface="Calibri"/>
-              </a:defRPr>
-            </a:pPr>
-            <a:r>
-              <a:t>Misses interactions between factors entirely</a:t>
+                  <a:srgbClr val="333333"/>
+                </a:solidFill>
+                <a:latin typeface="Inter"/>
+              </a:defRPr>
+            </a:pPr>
+            <a:r>
+              <a:t>Example: tuning a web server</a:t>
             </a:r>
           </a:p>
           <a:p>
             <a:pPr lvl="1">
               <a:spcAft>
-                <a:spcPts val="800"/>
+                <a:spcPts val="600"/>
               </a:spcAft>
-              <a:defRPr sz="1900">
-                <a:solidFill>
-                  <a:srgbClr val="222222"/>
-                </a:solidFill>
-                <a:latin typeface="Calibri"/>
-              </a:defRPr>
-            </a:pPr>
-            <a:r>
-              <a:t>Requires more runs to learn the same amount</a:t>
+              <a:defRPr sz="1700">
+                <a:solidFill>
+                  <a:srgbClr val="666666"/>
+                </a:solidFill>
+                <a:latin typeface="Inter"/>
+              </a:defRPr>
+            </a:pPr>
+            <a:r>
+              <a:t>OVAT: 3 factors × 3 levels = 9 runs, misses interactions</a:t>
             </a:r>
           </a:p>
           <a:p>
             <a:pPr lvl="1">
               <a:spcAft>
-                <a:spcPts val="800"/>
+                <a:spcPts val="600"/>
               </a:spcAft>
-              <a:defRPr sz="1900">
-                <a:solidFill>
-                  <a:srgbClr val="222222"/>
-                </a:solidFill>
-                <a:latin typeface="Calibri"/>
-              </a:defRPr>
-            </a:pPr>
-            <a:r>
-              <a:t>Can converge on wrong optimum</a:t>
-            </a:r>
-          </a:p>
-          <a:p>
-            <a:pPr>
-              <a:spcAft>
-                <a:spcPts val="800"/>
-              </a:spcAft>
-              <a:defRPr sz="2200" b="0">
-                <a:solidFill>
-                  <a:srgbClr val="222222"/>
-                </a:solidFill>
-                <a:latin typeface="Calibri"/>
-              </a:defRPr>
-            </a:pPr>
-            <a:r>
-              <a:t>Example: tuning a web server</a:t>
-            </a:r>
-          </a:p>
-          <a:p>
-            <a:pPr lvl="1">
-              <a:spcAft>
-                <a:spcPts val="800"/>
-              </a:spcAft>
-              <a:defRPr sz="1900">
-                <a:solidFill>
-                  <a:srgbClr val="222222"/>
-                </a:solidFill>
-                <a:latin typeface="Calibri"/>
-              </a:defRPr>
-            </a:pPr>
-            <a:r>
-              <a:t>OVAT: 3 factors x 3 levels = 9 runs, misses interactions</a:t>
-            </a:r>
-          </a:p>
-          <a:p>
-            <a:pPr lvl="1">
-              <a:spcAft>
-                <a:spcPts val="800"/>
-              </a:spcAft>
-              <a:defRPr sz="1900">
-                <a:solidFill>
-                  <a:srgbClr val="222222"/>
-                </a:solidFill>
-                <a:latin typeface="Calibri"/>
-              </a:defRPr>
-            </a:pPr>
-            <a:r>
-              <a:t>Full factorial: 2^3 = 8 runs, captures all interactions</a:t>
+              <a:defRPr sz="1700">
+                <a:solidFill>
+                  <a:srgbClr val="666666"/>
+                </a:solidFill>
+                <a:latin typeface="Inter"/>
+              </a:defRPr>
+            </a:pPr>
+            <a:r>
+              <a:t>Full factorial: 2³ = 8 runs, captures all interactions</a:t>
+            </a:r>
+          </a:p>
+        </p:txBody>
+      </p:sp>
+      <p:sp>
+        <p:nvSpPr>
+          <p:cNvPr id="6" name="TextBox 5"/>
+          <p:cNvSpPr txBox="1"/>
+          <p:nvPr/>
+        </p:nvSpPr>
+        <p:spPr>
+          <a:xfrm>
+            <a:off x="731520" y="6400800"/>
+            <a:ext cx="10058400" cy="365760"/>
+          </a:xfrm>
+          <a:prstGeom prst="rect">
+            <a:avLst/>
+          </a:prstGeom>
+          <a:noFill/>
+        </p:spPr>
+        <p:txBody>
+          <a:bodyPr wrap="square">
+            <a:spAutoFit/>
+          </a:bodyPr>
+          <a:lstStyle/>
+          <a:p>
+            <a:pPr algn="l">
+              <a:defRPr sz="1000" b="0">
+                <a:solidFill>
+                  <a:srgbClr val="999999"/>
+                </a:solidFill>
+                <a:latin typeface="Consolas"/>
+              </a:defRPr>
+            </a:pPr>
+            <a:r>
+              <a:t>© 2026 Martin J. Gallagher  |  GPL-3.0-or-later  |  doehelper.com</a:t>
             </a:r>
           </a:p>
         </p:txBody>
@@ -5032,7 +6366,7 @@
     <p:bg>
       <p:bgPr>
         <a:solidFill>
-          <a:srgbClr val="FFFFFF"/>
+          <a:srgbClr val="FAFAFA"/>
         </a:solidFill>
         <a:effectLst/>
       </p:bgPr>
@@ -5053,13 +6387,13 @@
         <p:spPr>
           <a:xfrm>
             <a:off x="0" y="0"/>
-            <a:ext cx="12191695" cy="54864"/>
+            <a:ext cx="12191695" cy="45720"/>
           </a:xfrm>
           <a:prstGeom prst="rect">
             <a:avLst/>
           </a:prstGeom>
           <a:solidFill>
-            <a:srgbClr val="007BFF"/>
+            <a:srgbClr val="5046E5"/>
           </a:solidFill>
           <a:ln>
             <a:noFill/>
@@ -5089,14 +6423,57 @@
       </p:sp>
       <p:sp>
         <p:nvSpPr>
-          <p:cNvPr id="3" name="TextBox 2"/>
+          <p:cNvPr id="3" name="Rectangle 2"/>
+          <p:cNvSpPr/>
+          <p:nvPr/>
+        </p:nvSpPr>
+        <p:spPr>
+          <a:xfrm>
+            <a:off x="548640" y="411480"/>
+            <a:ext cx="36576" cy="502920"/>
+          </a:xfrm>
+          <a:prstGeom prst="rect">
+            <a:avLst/>
+          </a:prstGeom>
+          <a:solidFill>
+            <a:srgbClr val="5046E5"/>
+          </a:solidFill>
+          <a:ln>
+            <a:noFill/>
+          </a:ln>
+        </p:spPr>
+        <p:style>
+          <a:lnRef idx="1">
+            <a:schemeClr val="accent1"/>
+          </a:lnRef>
+          <a:fillRef idx="3">
+            <a:schemeClr val="accent1"/>
+          </a:fillRef>
+          <a:effectRef idx="2">
+            <a:schemeClr val="accent1"/>
+          </a:effectRef>
+          <a:fontRef idx="minor">
+            <a:schemeClr val="lt1"/>
+          </a:fontRef>
+        </p:style>
+        <p:txBody>
+          <a:bodyPr rtlCol="0" anchor="ctr"/>
+          <a:lstStyle/>
+          <a:p>
+            <a:pPr algn="ctr"/>
+          </a:p>
+        </p:txBody>
+      </p:sp>
+      <p:sp>
+        <p:nvSpPr>
+          <p:cNvPr id="4" name="TextBox 3"/>
           <p:cNvSpPr txBox="1"/>
           <p:nvPr/>
         </p:nvSpPr>
         <p:spPr>
           <a:xfrm>
-            <a:off x="731520" y="365760"/>
-            <a:ext cx="10515600" cy="822960"/>
+            <a:off x="777240" y="365760"/>
+            <a:ext cx="10058400" cy="640080"/>
           </a:xfrm>
           <a:prstGeom prst="rect">
             <a:avLst/>
@@ -5109,12 +6486,12 @@
           </a:bodyPr>
           <a:lstStyle/>
           <a:p>
-            <a:pPr>
-              <a:defRPr sz="3200" b="1">
-                <a:solidFill>
-                  <a:srgbClr val="222222"/>
-                </a:solidFill>
-                <a:latin typeface="Calibri"/>
+            <a:pPr algn="l">
+              <a:defRPr sz="2800" b="1">
+                <a:solidFill>
+                  <a:srgbClr val="111111"/>
+                </a:solidFill>
+                <a:latin typeface="Inter"/>
               </a:defRPr>
             </a:pPr>
             <a:r>
@@ -5125,14 +6502,14 @@
       </p:sp>
       <p:sp>
         <p:nvSpPr>
-          <p:cNvPr id="4" name="TextBox 3"/>
+          <p:cNvPr id="5" name="TextBox 4"/>
           <p:cNvSpPr txBox="1"/>
           <p:nvPr/>
         </p:nvSpPr>
         <p:spPr>
           <a:xfrm>
-            <a:off x="914400" y="1463040"/>
-            <a:ext cx="10058400" cy="4754880"/>
+            <a:off x="822960" y="1188720"/>
+            <a:ext cx="10241280" cy="5120640"/>
           </a:xfrm>
           <a:prstGeom prst="rect">
             <a:avLst/>
@@ -5147,113 +6524,149 @@
           <a:p>
             <a:pPr>
               <a:spcAft>
-                <a:spcPts val="800"/>
+                <a:spcPts val="600"/>
               </a:spcAft>
-              <a:defRPr sz="2200" b="0">
-                <a:solidFill>
-                  <a:srgbClr val="222222"/>
-                </a:solidFill>
-                <a:latin typeface="Calibri"/>
-              </a:defRPr>
-            </a:pPr>
-            <a:r>
-              <a:t>Factor: a variable you control (e.g. temperature, cache size)</a:t>
+              <a:defRPr sz="1900">
+                <a:solidFill>
+                  <a:srgbClr val="333333"/>
+                </a:solidFill>
+                <a:latin typeface="Inter"/>
+              </a:defRPr>
+            </a:pPr>
+            <a:r>
+              <a:t>Factor — a variable you control (e.g. temperature, cache size)</a:t>
             </a:r>
           </a:p>
           <a:p>
             <a:pPr>
               <a:spcAft>
-                <a:spcPts val="800"/>
+                <a:spcPts val="600"/>
               </a:spcAft>
-              <a:defRPr sz="2200" b="0">
-                <a:solidFill>
-                  <a:srgbClr val="222222"/>
-                </a:solidFill>
-                <a:latin typeface="Calibri"/>
-              </a:defRPr>
-            </a:pPr>
-            <a:r>
-              <a:t>Level: specific value of a factor (e.g. low/high, 100/200/300)</a:t>
+              <a:defRPr sz="1900">
+                <a:solidFill>
+                  <a:srgbClr val="333333"/>
+                </a:solidFill>
+                <a:latin typeface="Inter"/>
+              </a:defRPr>
+            </a:pPr>
+            <a:r>
+              <a:t>Level — specific value of a factor (e.g. low/high, 100/200/300)</a:t>
             </a:r>
           </a:p>
           <a:p>
             <a:pPr>
               <a:spcAft>
-                <a:spcPts val="800"/>
+                <a:spcPts val="600"/>
               </a:spcAft>
-              <a:defRPr sz="2200" b="0">
-                <a:solidFill>
-                  <a:srgbClr val="222222"/>
-                </a:solidFill>
-                <a:latin typeface="Calibri"/>
-              </a:defRPr>
-            </a:pPr>
-            <a:r>
-              <a:t>Response: what you measure (e.g. throughput, yield, cost)</a:t>
+              <a:defRPr sz="1900">
+                <a:solidFill>
+                  <a:srgbClr val="333333"/>
+                </a:solidFill>
+                <a:latin typeface="Inter"/>
+              </a:defRPr>
+            </a:pPr>
+            <a:r>
+              <a:t>Response — what you measure (e.g. throughput, yield, cost)</a:t>
             </a:r>
           </a:p>
           <a:p>
             <a:pPr>
               <a:spcAft>
-                <a:spcPts val="800"/>
+                <a:spcPts val="600"/>
               </a:spcAft>
-              <a:defRPr sz="2200" b="0">
-                <a:solidFill>
-                  <a:srgbClr val="222222"/>
-                </a:solidFill>
-                <a:latin typeface="Calibri"/>
-              </a:defRPr>
-            </a:pPr>
-            <a:r>
-              <a:t>Main Effect: the impact of one factor on the response</a:t>
+              <a:defRPr sz="1900">
+                <a:solidFill>
+                  <a:srgbClr val="333333"/>
+                </a:solidFill>
+                <a:latin typeface="Inter"/>
+              </a:defRPr>
+            </a:pPr>
+            <a:r>
+              <a:t>Main Effect — the average impact of one factor on the response</a:t>
             </a:r>
           </a:p>
           <a:p>
             <a:pPr>
               <a:spcAft>
-                <a:spcPts val="800"/>
+                <a:spcPts val="600"/>
               </a:spcAft>
-              <a:defRPr sz="2200" b="0">
-                <a:solidFill>
-                  <a:srgbClr val="222222"/>
-                </a:solidFill>
-                <a:latin typeface="Calibri"/>
-              </a:defRPr>
-            </a:pPr>
-            <a:r>
-              <a:t>Interaction: when the effect of one factor depends on another</a:t>
+              <a:defRPr sz="1900">
+                <a:solidFill>
+                  <a:srgbClr val="333333"/>
+                </a:solidFill>
+                <a:latin typeface="Inter"/>
+              </a:defRPr>
+            </a:pPr>
+            <a:r>
+              <a:t>Interaction — when the effect of one factor depends on another</a:t>
             </a:r>
           </a:p>
           <a:p>
             <a:pPr>
               <a:spcAft>
-                <a:spcPts val="800"/>
+                <a:spcPts val="600"/>
               </a:spcAft>
-              <a:defRPr sz="2200" b="0">
-                <a:solidFill>
-                  <a:srgbClr val="222222"/>
-                </a:solidFill>
-                <a:latin typeface="Calibri"/>
-              </a:defRPr>
-            </a:pPr>
-            <a:r>
-              <a:t>Design Matrix: the table of all planned experimental runs</a:t>
+              <a:defRPr sz="1900">
+                <a:solidFill>
+                  <a:srgbClr val="333333"/>
+                </a:solidFill>
+                <a:latin typeface="Inter"/>
+              </a:defRPr>
+            </a:pPr>
+            <a:r>
+              <a:t>Design Matrix — the table of all planned experimental runs</a:t>
             </a:r>
           </a:p>
           <a:p>
             <a:pPr>
               <a:spcAft>
-                <a:spcPts val="800"/>
+                <a:spcPts val="600"/>
               </a:spcAft>
-              <a:defRPr sz="2200" b="0">
-                <a:solidFill>
-                  <a:srgbClr val="222222"/>
-                </a:solidFill>
-                <a:latin typeface="Calibri"/>
-              </a:defRPr>
-            </a:pPr>
-            <a:r>
-              <a:t>Randomisation: running experiments in random order to avoid bias</a:t>
+              <a:defRPr sz="1900">
+                <a:solidFill>
+                  <a:srgbClr val="333333"/>
+                </a:solidFill>
+                <a:latin typeface="Inter"/>
+              </a:defRPr>
+            </a:pPr>
+            <a:r>
+              <a:t>Randomisation — running in random order to avoid bias</a:t>
+            </a:r>
+          </a:p>
+        </p:txBody>
+      </p:sp>
+      <p:sp>
+        <p:nvSpPr>
+          <p:cNvPr id="6" name="TextBox 5"/>
+          <p:cNvSpPr txBox="1"/>
+          <p:nvPr/>
+        </p:nvSpPr>
+        <p:spPr>
+          <a:xfrm>
+            <a:off x="731520" y="6400800"/>
+            <a:ext cx="10058400" cy="365760"/>
+          </a:xfrm>
+          <a:prstGeom prst="rect">
+            <a:avLst/>
+          </a:prstGeom>
+          <a:noFill/>
+        </p:spPr>
+        <p:txBody>
+          <a:bodyPr wrap="square">
+            <a:spAutoFit/>
+          </a:bodyPr>
+          <a:lstStyle/>
+          <a:p>
+            <a:pPr algn="l">
+              <a:defRPr sz="1000" b="0">
+                <a:solidFill>
+                  <a:srgbClr val="999999"/>
+                </a:solidFill>
+                <a:latin typeface="Consolas"/>
+              </a:defRPr>
+            </a:pPr>
+            <a:r>
+              <a:t>© 2026 Martin J. Gallagher  |  GPL-3.0-or-later  |  doehelper.com</a:t>
             </a:r>
           </a:p>
         </p:txBody>
@@ -5272,7 +6685,7 @@
     <p:bg>
       <p:bgPr>
         <a:solidFill>
-          <a:srgbClr val="FFFFFF"/>
+          <a:srgbClr val="FAFAFA"/>
         </a:solidFill>
         <a:effectLst/>
       </p:bgPr>
@@ -5293,13 +6706,13 @@
         <p:spPr>
           <a:xfrm>
             <a:off x="0" y="0"/>
-            <a:ext cx="12191695" cy="54864"/>
+            <a:ext cx="12191695" cy="45720"/>
           </a:xfrm>
           <a:prstGeom prst="rect">
             <a:avLst/>
           </a:prstGeom>
           <a:solidFill>
-            <a:srgbClr val="007BFF"/>
+            <a:srgbClr val="5046E5"/>
           </a:solidFill>
           <a:ln>
             <a:noFill/>
@@ -5329,14 +6742,57 @@
       </p:sp>
       <p:sp>
         <p:nvSpPr>
-          <p:cNvPr id="3" name="TextBox 2"/>
+          <p:cNvPr id="3" name="Rectangle 2"/>
+          <p:cNvSpPr/>
+          <p:nvPr/>
+        </p:nvSpPr>
+        <p:spPr>
+          <a:xfrm>
+            <a:off x="548640" y="411480"/>
+            <a:ext cx="36576" cy="502920"/>
+          </a:xfrm>
+          <a:prstGeom prst="rect">
+            <a:avLst/>
+          </a:prstGeom>
+          <a:solidFill>
+            <a:srgbClr val="5046E5"/>
+          </a:solidFill>
+          <a:ln>
+            <a:noFill/>
+          </a:ln>
+        </p:spPr>
+        <p:style>
+          <a:lnRef idx="1">
+            <a:schemeClr val="accent1"/>
+          </a:lnRef>
+          <a:fillRef idx="3">
+            <a:schemeClr val="accent1"/>
+          </a:fillRef>
+          <a:effectRef idx="2">
+            <a:schemeClr val="accent1"/>
+          </a:effectRef>
+          <a:fontRef idx="minor">
+            <a:schemeClr val="lt1"/>
+          </a:fontRef>
+        </p:style>
+        <p:txBody>
+          <a:bodyPr rtlCol="0" anchor="ctr"/>
+          <a:lstStyle/>
+          <a:p>
+            <a:pPr algn="ctr"/>
+          </a:p>
+        </p:txBody>
+      </p:sp>
+      <p:sp>
+        <p:nvSpPr>
+          <p:cNvPr id="4" name="TextBox 3"/>
           <p:cNvSpPr txBox="1"/>
           <p:nvPr/>
         </p:nvSpPr>
         <p:spPr>
           <a:xfrm>
-            <a:off x="731520" y="365760"/>
-            <a:ext cx="10515600" cy="822960"/>
+            <a:off x="777240" y="365760"/>
+            <a:ext cx="10058400" cy="640080"/>
           </a:xfrm>
           <a:prstGeom prst="rect">
             <a:avLst/>
@@ -5349,12 +6805,12 @@
           </a:bodyPr>
           <a:lstStyle/>
           <a:p>
-            <a:pPr>
-              <a:defRPr sz="3200" b="1">
-                <a:solidFill>
-                  <a:srgbClr val="222222"/>
-                </a:solidFill>
-                <a:latin typeface="Calibri"/>
+            <a:pPr algn="l">
+              <a:defRPr sz="2800" b="1">
+                <a:solidFill>
+                  <a:srgbClr val="111111"/>
+                </a:solidFill>
+                <a:latin typeface="Inter"/>
               </a:defRPr>
             </a:pPr>
             <a:r>
@@ -5365,14 +6821,14 @@
       </p:sp>
       <p:sp>
         <p:nvSpPr>
-          <p:cNvPr id="4" name="TextBox 3"/>
+          <p:cNvPr id="5" name="TextBox 4"/>
           <p:cNvSpPr txBox="1"/>
           <p:nvPr/>
         </p:nvSpPr>
         <p:spPr>
           <a:xfrm>
-            <a:off x="914400" y="1463040"/>
-            <a:ext cx="10058400" cy="4754880"/>
+            <a:off x="822960" y="1188720"/>
+            <a:ext cx="10241280" cy="5120640"/>
           </a:xfrm>
           <a:prstGeom prst="rect">
             <a:avLst/>
@@ -5387,29 +6843,29 @@
           <a:p>
             <a:pPr>
               <a:spcAft>
-                <a:spcPts val="800"/>
+                <a:spcPts val="600"/>
               </a:spcAft>
-              <a:defRPr sz="2200" b="0">
-                <a:solidFill>
-                  <a:srgbClr val="222222"/>
-                </a:solidFill>
-                <a:latin typeface="Calibri"/>
-              </a:defRPr>
-            </a:pPr>
-            <a:r>
-              <a:t>In most systems, only a few factors have large effects</a:t>
+              <a:defRPr sz="1900">
+                <a:solidFill>
+                  <a:srgbClr val="333333"/>
+                </a:solidFill>
+                <a:latin typeface="Inter"/>
+              </a:defRPr>
+            </a:pPr>
+            <a:r>
+              <a:t>In most systems only a few factors have large effects</a:t>
             </a:r>
           </a:p>
           <a:p>
             <a:pPr>
               <a:spcAft>
-                <a:spcPts val="800"/>
+                <a:spcPts val="600"/>
               </a:spcAft>
-              <a:defRPr sz="2200" b="0">
-                <a:solidFill>
-                  <a:srgbClr val="222222"/>
-                </a:solidFill>
-                <a:latin typeface="Calibri"/>
+              <a:defRPr sz="1900">
+                <a:solidFill>
+                  <a:srgbClr val="333333"/>
+                </a:solidFill>
+                <a:latin typeface="Inter"/>
               </a:defRPr>
             </a:pPr>
             <a:r>
@@ -5419,13 +6875,13 @@
           <a:p>
             <a:pPr>
               <a:spcAft>
-                <a:spcPts val="800"/>
+                <a:spcPts val="600"/>
               </a:spcAft>
-              <a:defRPr sz="2200" b="0">
-                <a:solidFill>
-                  <a:srgbClr val="222222"/>
-                </a:solidFill>
-                <a:latin typeface="Calibri"/>
+              <a:defRPr sz="1900">
+                <a:solidFill>
+                  <a:srgbClr val="333333"/>
+                </a:solidFill>
+                <a:latin typeface="Inter"/>
               </a:defRPr>
             </a:pPr>
             <a:r>
@@ -5435,13 +6891,13 @@
           <a:p>
             <a:pPr>
               <a:spcAft>
-                <a:spcPts val="800"/>
+                <a:spcPts val="600"/>
               </a:spcAft>
-              <a:defRPr sz="2200" b="0">
-                <a:solidFill>
-                  <a:srgbClr val="222222"/>
-                </a:solidFill>
-                <a:latin typeface="Calibri"/>
+              <a:defRPr sz="1900">
+                <a:solidFill>
+                  <a:srgbClr val="333333"/>
+                </a:solidFill>
+                <a:latin typeface="Inter"/>
               </a:defRPr>
             </a:pPr>
             <a:r>
@@ -5451,13 +6907,13 @@
           <a:p>
             <a:pPr>
               <a:spcAft>
-                <a:spcPts val="800"/>
+                <a:spcPts val="600"/>
               </a:spcAft>
-              <a:defRPr sz="2200" b="0">
-                <a:solidFill>
-                  <a:srgbClr val="222222"/>
-                </a:solidFill>
-                <a:latin typeface="Calibri"/>
+              <a:defRPr sz="1900">
+                <a:solidFill>
+                  <a:srgbClr val="333333"/>
+                </a:solidFill>
+                <a:latin typeface="Inter"/>
               </a:defRPr>
             </a:pPr>
             <a:r>
@@ -5467,17 +6923,53 @@
           <a:p>
             <a:pPr>
               <a:spcAft>
-                <a:spcPts val="800"/>
+                <a:spcPts val="600"/>
               </a:spcAft>
-              <a:defRPr sz="2200" b="0">
-                <a:solidFill>
-                  <a:srgbClr val="222222"/>
-                </a:solidFill>
-                <a:latin typeface="Calibri"/>
-              </a:defRPr>
-            </a:pPr>
-            <a:r>
-              <a:t>doe-helper supports this workflow: screen -&gt; refine -&gt; optimise</a:t>
+              <a:defRPr sz="1900">
+                <a:solidFill>
+                  <a:srgbClr val="333333"/>
+                </a:solidFill>
+                <a:latin typeface="Inter"/>
+              </a:defRPr>
+            </a:pPr>
+            <a:r>
+              <a:t>doe-helper supports this: screen → refine → optimise</a:t>
+            </a:r>
+          </a:p>
+        </p:txBody>
+      </p:sp>
+      <p:sp>
+        <p:nvSpPr>
+          <p:cNvPr id="6" name="TextBox 5"/>
+          <p:cNvSpPr txBox="1"/>
+          <p:nvPr/>
+        </p:nvSpPr>
+        <p:spPr>
+          <a:xfrm>
+            <a:off x="731520" y="6400800"/>
+            <a:ext cx="10058400" cy="365760"/>
+          </a:xfrm>
+          <a:prstGeom prst="rect">
+            <a:avLst/>
+          </a:prstGeom>
+          <a:noFill/>
+        </p:spPr>
+        <p:txBody>
+          <a:bodyPr wrap="square">
+            <a:spAutoFit/>
+          </a:bodyPr>
+          <a:lstStyle/>
+          <a:p>
+            <a:pPr algn="l">
+              <a:defRPr sz="1000" b="0">
+                <a:solidFill>
+                  <a:srgbClr val="999999"/>
+                </a:solidFill>
+                <a:latin typeface="Consolas"/>
+              </a:defRPr>
+            </a:pPr>
+            <a:r>
+              <a:t>© 2026 Martin J. Gallagher  |  GPL-3.0-or-later  |  doehelper.com</a:t>
             </a:r>
           </a:p>
         </p:txBody>
@@ -5496,7 +6988,7 @@
     <p:bg>
       <p:bgPr>
         <a:solidFill>
-          <a:srgbClr val="FFFFFF"/>
+          <a:srgbClr val="FAFAFA"/>
         </a:solidFill>
         <a:effectLst/>
       </p:bgPr>
@@ -5517,13 +7009,13 @@
         <p:spPr>
           <a:xfrm>
             <a:off x="0" y="0"/>
-            <a:ext cx="12191695" cy="54864"/>
+            <a:ext cx="12191695" cy="45720"/>
           </a:xfrm>
           <a:prstGeom prst="rect">
             <a:avLst/>
           </a:prstGeom>
           <a:solidFill>
-            <a:srgbClr val="007BFF"/>
+            <a:srgbClr val="5046E5"/>
           </a:solidFill>
           <a:ln>
             <a:noFill/>
@@ -5553,14 +7045,57 @@
       </p:sp>
       <p:sp>
         <p:nvSpPr>
-          <p:cNvPr id="3" name="TextBox 2"/>
+          <p:cNvPr id="3" name="Rectangle 2"/>
+          <p:cNvSpPr/>
+          <p:nvPr/>
+        </p:nvSpPr>
+        <p:spPr>
+          <a:xfrm>
+            <a:off x="548640" y="411480"/>
+            <a:ext cx="36576" cy="502920"/>
+          </a:xfrm>
+          <a:prstGeom prst="rect">
+            <a:avLst/>
+          </a:prstGeom>
+          <a:solidFill>
+            <a:srgbClr val="5046E5"/>
+          </a:solidFill>
+          <a:ln>
+            <a:noFill/>
+          </a:ln>
+        </p:spPr>
+        <p:style>
+          <a:lnRef idx="1">
+            <a:schemeClr val="accent1"/>
+          </a:lnRef>
+          <a:fillRef idx="3">
+            <a:schemeClr val="accent1"/>
+          </a:fillRef>
+          <a:effectRef idx="2">
+            <a:schemeClr val="accent1"/>
+          </a:effectRef>
+          <a:fontRef idx="minor">
+            <a:schemeClr val="lt1"/>
+          </a:fontRef>
+        </p:style>
+        <p:txBody>
+          <a:bodyPr rtlCol="0" anchor="ctr"/>
+          <a:lstStyle/>
+          <a:p>
+            <a:pPr algn="ctr"/>
+          </a:p>
+        </p:txBody>
+      </p:sp>
+      <p:sp>
+        <p:nvSpPr>
+          <p:cNvPr id="4" name="TextBox 3"/>
           <p:cNvSpPr txBox="1"/>
           <p:nvPr/>
         </p:nvSpPr>
         <p:spPr>
           <a:xfrm>
-            <a:off x="731520" y="365760"/>
-            <a:ext cx="10515600" cy="822960"/>
+            <a:off x="777240" y="365760"/>
+            <a:ext cx="10058400" cy="640080"/>
           </a:xfrm>
           <a:prstGeom prst="rect">
             <a:avLst/>
@@ -5573,12 +7108,12 @@
           </a:bodyPr>
           <a:lstStyle/>
           <a:p>
-            <a:pPr>
-              <a:defRPr sz="3200" b="1">
-                <a:solidFill>
-                  <a:srgbClr val="222222"/>
-                </a:solidFill>
-                <a:latin typeface="Calibri"/>
+            <a:pPr algn="l">
+              <a:defRPr sz="2800" b="1">
+                <a:solidFill>
+                  <a:srgbClr val="111111"/>
+                </a:solidFill>
+                <a:latin typeface="Inter"/>
               </a:defRPr>
             </a:pPr>
             <a:r>
@@ -5589,14 +7124,14 @@
       </p:sp>
       <p:sp>
         <p:nvSpPr>
-          <p:cNvPr id="4" name="TextBox 3"/>
+          <p:cNvPr id="5" name="TextBox 4"/>
           <p:cNvSpPr txBox="1"/>
           <p:nvPr/>
         </p:nvSpPr>
         <p:spPr>
           <a:xfrm>
-            <a:off x="914400" y="1463040"/>
-            <a:ext cx="10058400" cy="4754880"/>
+            <a:off x="822960" y="1188720"/>
+            <a:ext cx="10241280" cy="5120640"/>
           </a:xfrm>
           <a:prstGeom prst="rect">
             <a:avLst/>
@@ -5611,113 +7146,149 @@
           <a:p>
             <a:pPr>
               <a:spcAft>
-                <a:spcPts val="800"/>
+                <a:spcPts val="600"/>
               </a:spcAft>
-              <a:defRPr sz="2200" b="0">
-                <a:solidFill>
-                  <a:srgbClr val="222222"/>
-                </a:solidFill>
-                <a:latin typeface="Calibri"/>
-              </a:defRPr>
-            </a:pPr>
-            <a:r>
-              <a:t>1. Define objectives: what do you want to learn or optimise?</a:t>
+              <a:defRPr sz="1900">
+                <a:solidFill>
+                  <a:srgbClr val="333333"/>
+                </a:solidFill>
+                <a:latin typeface="Inter"/>
+              </a:defRPr>
+            </a:pPr>
+            <a:r>
+              <a:t>1.  Define objectives — what do you want to learn or optimise?</a:t>
             </a:r>
           </a:p>
           <a:p>
             <a:pPr>
               <a:spcAft>
-                <a:spcPts val="800"/>
+                <a:spcPts val="600"/>
               </a:spcAft>
-              <a:defRPr sz="2200" b="0">
-                <a:solidFill>
-                  <a:srgbClr val="222222"/>
-                </a:solidFill>
-                <a:latin typeface="Calibri"/>
-              </a:defRPr>
-            </a:pPr>
-            <a:r>
-              <a:t>2. Select factors and levels: what can you control?</a:t>
+              <a:defRPr sz="1900">
+                <a:solidFill>
+                  <a:srgbClr val="333333"/>
+                </a:solidFill>
+                <a:latin typeface="Inter"/>
+              </a:defRPr>
+            </a:pPr>
+            <a:r>
+              <a:t>2.  Select factors and levels — what can you control?</a:t>
             </a:r>
           </a:p>
           <a:p>
             <a:pPr>
               <a:spcAft>
-                <a:spcPts val="800"/>
+                <a:spcPts val="600"/>
               </a:spcAft>
-              <a:defRPr sz="2200" b="0">
-                <a:solidFill>
-                  <a:srgbClr val="222222"/>
-                </a:solidFill>
-                <a:latin typeface="Calibri"/>
-              </a:defRPr>
-            </a:pPr>
-            <a:r>
-              <a:t>3. Choose a design: how many runs can you afford?</a:t>
+              <a:defRPr sz="1900">
+                <a:solidFill>
+                  <a:srgbClr val="333333"/>
+                </a:solidFill>
+                <a:latin typeface="Inter"/>
+              </a:defRPr>
+            </a:pPr>
+            <a:r>
+              <a:t>3.  Choose a design — how many runs can you afford?</a:t>
             </a:r>
           </a:p>
           <a:p>
             <a:pPr>
               <a:spcAft>
-                <a:spcPts val="800"/>
+                <a:spcPts val="600"/>
               </a:spcAft>
-              <a:defRPr sz="2200" b="0">
-                <a:solidFill>
-                  <a:srgbClr val="222222"/>
-                </a:solidFill>
-                <a:latin typeface="Calibri"/>
-              </a:defRPr>
-            </a:pPr>
-            <a:r>
-              <a:t>4. Generate the design matrix and run experiments</a:t>
+              <a:defRPr sz="1900">
+                <a:solidFill>
+                  <a:srgbClr val="333333"/>
+                </a:solidFill>
+                <a:latin typeface="Inter"/>
+              </a:defRPr>
+            </a:pPr>
+            <a:r>
+              <a:t>4.  Generate the design matrix and run experiments</a:t>
             </a:r>
           </a:p>
           <a:p>
             <a:pPr>
               <a:spcAft>
-                <a:spcPts val="800"/>
+                <a:spcPts val="600"/>
               </a:spcAft>
-              <a:defRPr sz="2200" b="0">
-                <a:solidFill>
-                  <a:srgbClr val="222222"/>
-                </a:solidFill>
-                <a:latin typeface="Calibri"/>
-              </a:defRPr>
-            </a:pPr>
-            <a:r>
-              <a:t>5. Analyse results: which factors matter?</a:t>
+              <a:defRPr sz="1900">
+                <a:solidFill>
+                  <a:srgbClr val="333333"/>
+                </a:solidFill>
+                <a:latin typeface="Inter"/>
+              </a:defRPr>
+            </a:pPr>
+            <a:r>
+              <a:t>5.  Analyse results — which factors matter?</a:t>
             </a:r>
           </a:p>
           <a:p>
             <a:pPr>
               <a:spcAft>
-                <a:spcPts val="800"/>
+                <a:spcPts val="600"/>
               </a:spcAft>
-              <a:defRPr sz="2200" b="0">
-                <a:solidFill>
-                  <a:srgbClr val="222222"/>
-                </a:solidFill>
-                <a:latin typeface="Calibri"/>
-              </a:defRPr>
-            </a:pPr>
-            <a:r>
-              <a:t>6. Interpret and act: confirm, refine, or optimise</a:t>
+              <a:defRPr sz="1900">
+                <a:solidFill>
+                  <a:srgbClr val="333333"/>
+                </a:solidFill>
+                <a:latin typeface="Inter"/>
+              </a:defRPr>
+            </a:pPr>
+            <a:r>
+              <a:t>6.  Interpret and act — confirm, refine, or optimise</a:t>
             </a:r>
           </a:p>
           <a:p>
             <a:pPr>
               <a:spcAft>
-                <a:spcPts val="800"/>
+                <a:spcPts val="600"/>
               </a:spcAft>
-              <a:defRPr sz="2200" b="0">
-                <a:solidFill>
-                  <a:srgbClr val="222222"/>
-                </a:solidFill>
-                <a:latin typeface="Calibri"/>
-              </a:defRPr>
-            </a:pPr>
-            <a:r>
-              <a:t>doe-helper automates steps 3-6 and guides 1-2</a:t>
+              <a:defRPr sz="1900">
+                <a:solidFill>
+                  <a:srgbClr val="333333"/>
+                </a:solidFill>
+                <a:latin typeface="Inter"/>
+              </a:defRPr>
+            </a:pPr>
+            <a:r>
+              <a:t>doe-helper automates steps 3–6 and guides 1–2</a:t>
+            </a:r>
+          </a:p>
+        </p:txBody>
+      </p:sp>
+      <p:sp>
+        <p:nvSpPr>
+          <p:cNvPr id="6" name="TextBox 5"/>
+          <p:cNvSpPr txBox="1"/>
+          <p:nvPr/>
+        </p:nvSpPr>
+        <p:spPr>
+          <a:xfrm>
+            <a:off x="731520" y="6400800"/>
+            <a:ext cx="10058400" cy="365760"/>
+          </a:xfrm>
+          <a:prstGeom prst="rect">
+            <a:avLst/>
+          </a:prstGeom>
+          <a:noFill/>
+        </p:spPr>
+        <p:txBody>
+          <a:bodyPr wrap="square">
+            <a:spAutoFit/>
+          </a:bodyPr>
+          <a:lstStyle/>
+          <a:p>
+            <a:pPr algn="l">
+              <a:defRPr sz="1000" b="0">
+                <a:solidFill>
+                  <a:srgbClr val="999999"/>
+                </a:solidFill>
+                <a:latin typeface="Consolas"/>
+              </a:defRPr>
+            </a:pPr>
+            <a:r>
+              <a:t>© 2026 Martin J. Gallagher  |  GPL-3.0-or-later  |  doehelper.com</a:t>
             </a:r>
           </a:p>
         </p:txBody>
@@ -5736,7 +7307,7 @@
     <p:bg>
       <p:bgPr>
         <a:solidFill>
-          <a:srgbClr val="FFFFFF"/>
+          <a:srgbClr val="FAFAFA"/>
         </a:solidFill>
         <a:effectLst/>
       </p:bgPr>
@@ -5757,13 +7328,13 @@
         <p:spPr>
           <a:xfrm>
             <a:off x="0" y="0"/>
-            <a:ext cx="12191695" cy="54864"/>
+            <a:ext cx="12191695" cy="45720"/>
           </a:xfrm>
           <a:prstGeom prst="rect">
             <a:avLst/>
           </a:prstGeom>
           <a:solidFill>
-            <a:srgbClr val="00C853"/>
+            <a:srgbClr val="0D9488"/>
           </a:solidFill>
           <a:ln>
             <a:noFill/>
@@ -5799,8 +7370,8 @@
         </p:nvSpPr>
         <p:spPr>
           <a:xfrm>
-            <a:off x="731520" y="365760"/>
-            <a:ext cx="10515600" cy="822960"/>
+            <a:off x="777240" y="320040"/>
+            <a:ext cx="10058400" cy="548640"/>
           </a:xfrm>
           <a:prstGeom prst="rect">
             <a:avLst/>
@@ -5813,12 +7384,12 @@
           </a:bodyPr>
           <a:lstStyle/>
           <a:p>
-            <a:pPr>
-              <a:defRPr sz="3000" b="1">
-                <a:solidFill>
-                  <a:srgbClr val="222222"/>
-                </a:solidFill>
-                <a:latin typeface="Calibri"/>
+            <a:pPr algn="l">
+              <a:defRPr sz="2600" b="1">
+                <a:solidFill>
+                  <a:srgbClr val="111111"/>
+                </a:solidFill>
+                <a:latin typeface="Inter"/>
               </a:defRPr>
             </a:pPr>
             <a:r>
@@ -5829,20 +7400,20 @@
       </p:sp>
       <p:sp>
         <p:nvSpPr>
-          <p:cNvPr id="4" name="Rounded Rectangle 3"/>
+          <p:cNvPr id="4" name="Rectangle 3"/>
           <p:cNvSpPr/>
           <p:nvPr/>
         </p:nvSpPr>
         <p:spPr>
           <a:xfrm>
-            <a:off x="731520" y="1371600"/>
-            <a:ext cx="10515600" cy="4114800"/>
-          </a:xfrm>
-          <a:prstGeom prst="roundRect">
+            <a:off x="548640" y="1051560"/>
+            <a:ext cx="10972800" cy="320040"/>
+          </a:xfrm>
+          <a:prstGeom prst="rect">
             <a:avLst/>
           </a:prstGeom>
           <a:solidFill>
-            <a:srgbClr val="2D2D2D"/>
+            <a:srgbClr val="222222"/>
           </a:solidFill>
           <a:ln>
             <a:noFill/>
@@ -5863,16 +7434,95 @@
           </a:fontRef>
         </p:style>
         <p:txBody>
-          <a:bodyPr rtlCol="0" anchor="ctr" wrap="square" lIns="274320" tIns="274320"/>
+          <a:bodyPr rtlCol="0" anchor="ctr"/>
+          <a:lstStyle/>
+          <a:p>
+            <a:pPr algn="ctr"/>
+          </a:p>
+        </p:txBody>
+      </p:sp>
+      <p:sp>
+        <p:nvSpPr>
+          <p:cNvPr id="5" name="TextBox 4"/>
+          <p:cNvSpPr txBox="1"/>
+          <p:nvPr/>
+        </p:nvSpPr>
+        <p:spPr>
+          <a:xfrm>
+            <a:off x="822960" y="1051560"/>
+            <a:ext cx="3657600" cy="320040"/>
+          </a:xfrm>
+          <a:prstGeom prst="rect">
+            <a:avLst/>
+          </a:prstGeom>
+          <a:noFill/>
+        </p:spPr>
+        <p:txBody>
+          <a:bodyPr wrap="square" anchor="ctr">
+            <a:spAutoFit/>
+          </a:bodyPr>
+          <a:lstStyle/>
+          <a:p>
+            <a:pPr algn="l">
+              <a:defRPr sz="1000" b="0">
+                <a:solidFill>
+                  <a:srgbClr val="999999"/>
+                </a:solidFill>
+                <a:latin typeface="Consolas"/>
+              </a:defRPr>
+            </a:pPr>
+            <a:r>
+              <a:t>terminal</a:t>
+            </a:r>
+          </a:p>
+        </p:txBody>
+      </p:sp>
+      <p:sp>
+        <p:nvSpPr>
+          <p:cNvPr id="6" name="Rounded Rectangle 5"/>
+          <p:cNvSpPr/>
+          <p:nvPr/>
+        </p:nvSpPr>
+        <p:spPr>
+          <a:xfrm>
+            <a:off x="548640" y="1371600"/>
+            <a:ext cx="10972800" cy="3931920"/>
+          </a:xfrm>
+          <a:prstGeom prst="roundRect">
+            <a:avLst/>
+          </a:prstGeom>
+          <a:solidFill>
+            <a:srgbClr val="1A1A1A"/>
+          </a:solidFill>
+          <a:ln>
+            <a:noFill/>
+          </a:ln>
+        </p:spPr>
+        <p:style>
+          <a:lnRef idx="1">
+            <a:schemeClr val="accent1"/>
+          </a:lnRef>
+          <a:fillRef idx="3">
+            <a:schemeClr val="accent1"/>
+          </a:fillRef>
+          <a:effectRef idx="2">
+            <a:schemeClr val="accent1"/>
+          </a:effectRef>
+          <a:fontRef idx="minor">
+            <a:schemeClr val="lt1"/>
+          </a:fontRef>
+        </p:style>
+        <p:txBody>
+          <a:bodyPr rtlCol="0" anchor="ctr" wrap="square" lIns="274320" tIns="182880" rIns="274320"/>
           <a:lstStyle/>
           <a:p>
             <a:pPr algn="ctr">
               <a:spcAft>
-                <a:spcPts val="200"/>
+                <a:spcPts val="100"/>
               </a:spcAft>
-              <a:defRPr sz="1800">
-                <a:solidFill>
-                  <a:srgbClr val="D4D4D4"/>
+              <a:defRPr sz="1500">
+                <a:solidFill>
+                  <a:srgbClr val="6EC86E"/>
                 </a:solidFill>
                 <a:latin typeface="Consolas"/>
               </a:defRPr>
@@ -5884,11 +7534,11 @@
           <a:p>
             <a:pPr>
               <a:spcAft>
-                <a:spcPts val="200"/>
+                <a:spcPts val="100"/>
               </a:spcAft>
-              <a:defRPr sz="1800">
-                <a:solidFill>
-                  <a:srgbClr val="D4D4D4"/>
+              <a:defRPr sz="1500">
+                <a:solidFill>
+                  <a:srgbClr val="CCCCCC"/>
                 </a:solidFill>
                 <a:latin typeface="Consolas"/>
               </a:defRPr>
@@ -5897,11 +7547,11 @@
           <a:p>
             <a:pPr>
               <a:spcAft>
-                <a:spcPts val="200"/>
+                <a:spcPts val="100"/>
               </a:spcAft>
-              <a:defRPr sz="1800">
-                <a:solidFill>
-                  <a:srgbClr val="D4D4D4"/>
+              <a:defRPr sz="1500">
+                <a:solidFill>
+                  <a:srgbClr val="6EC86E"/>
                 </a:solidFill>
                 <a:latin typeface="Consolas"/>
               </a:defRPr>
@@ -5913,11 +7563,11 @@
           <a:p>
             <a:pPr>
               <a:spcAft>
-                <a:spcPts val="200"/>
+                <a:spcPts val="100"/>
               </a:spcAft>
-              <a:defRPr sz="1800">
-                <a:solidFill>
-                  <a:srgbClr val="D4D4D4"/>
+              <a:defRPr sz="1500">
+                <a:solidFill>
+                  <a:srgbClr val="CCCCCC"/>
                 </a:solidFill>
                 <a:latin typeface="Consolas"/>
               </a:defRPr>
@@ -5929,11 +7579,11 @@
           <a:p>
             <a:pPr>
               <a:spcAft>
-                <a:spcPts val="200"/>
+                <a:spcPts val="100"/>
               </a:spcAft>
-              <a:defRPr sz="1800">
-                <a:solidFill>
-                  <a:srgbClr val="D4D4D4"/>
+              <a:defRPr sz="1500">
+                <a:solidFill>
+                  <a:srgbClr val="CCCCCC"/>
                 </a:solidFill>
                 <a:latin typeface="Consolas"/>
               </a:defRPr>
@@ -5942,11 +7592,11 @@
           <a:p>
             <a:pPr>
               <a:spcAft>
-                <a:spcPts val="200"/>
+                <a:spcPts val="100"/>
               </a:spcAft>
-              <a:defRPr sz="1800">
-                <a:solidFill>
-                  <a:srgbClr val="D4D4D4"/>
+              <a:defRPr sz="1500">
+                <a:solidFill>
+                  <a:srgbClr val="6EC86E"/>
                 </a:solidFill>
                 <a:latin typeface="Consolas"/>
               </a:defRPr>
@@ -5958,11 +7608,11 @@
           <a:p>
             <a:pPr>
               <a:spcAft>
-                <a:spcPts val="200"/>
+                <a:spcPts val="100"/>
               </a:spcAft>
-              <a:defRPr sz="1800">
-                <a:solidFill>
-                  <a:srgbClr val="D4D4D4"/>
+              <a:defRPr sz="1500">
+                <a:solidFill>
+                  <a:srgbClr val="CCCCCC"/>
                 </a:solidFill>
                 <a:latin typeface="Consolas"/>
               </a:defRPr>
@@ -5974,11 +7624,11 @@
           <a:p>
             <a:pPr>
               <a:spcAft>
-                <a:spcPts val="200"/>
+                <a:spcPts val="100"/>
               </a:spcAft>
-              <a:defRPr sz="1800">
-                <a:solidFill>
-                  <a:srgbClr val="D4D4D4"/>
+              <a:defRPr sz="1500">
+                <a:solidFill>
+                  <a:srgbClr val="CCCCCC"/>
                 </a:solidFill>
                 <a:latin typeface="Consolas"/>
               </a:defRPr>
@@ -5990,11 +7640,11 @@
           <a:p>
             <a:pPr>
               <a:spcAft>
-                <a:spcPts val="200"/>
+                <a:spcPts val="100"/>
               </a:spcAft>
-              <a:defRPr sz="1800">
-                <a:solidFill>
-                  <a:srgbClr val="D4D4D4"/>
+              <a:defRPr sz="1500">
+                <a:solidFill>
+                  <a:srgbClr val="CCCCCC"/>
                 </a:solidFill>
                 <a:latin typeface="Consolas"/>
               </a:defRPr>
@@ -6003,11 +7653,11 @@
           <a:p>
             <a:pPr>
               <a:spcAft>
-                <a:spcPts val="200"/>
+                <a:spcPts val="100"/>
               </a:spcAft>
-              <a:defRPr sz="1800">
-                <a:solidFill>
-                  <a:srgbClr val="D4D4D4"/>
+              <a:defRPr sz="1500">
+                <a:solidFill>
+                  <a:srgbClr val="6EC86E"/>
                 </a:solidFill>
                 <a:latin typeface="Consolas"/>
               </a:defRPr>
@@ -6019,27 +7669,27 @@
           <a:p>
             <a:pPr>
               <a:spcAft>
-                <a:spcPts val="200"/>
+                <a:spcPts val="100"/>
               </a:spcAft>
-              <a:defRPr sz="1800">
-                <a:solidFill>
-                  <a:srgbClr val="D4D4D4"/>
+              <a:defRPr sz="1500">
+                <a:solidFill>
+                  <a:srgbClr val="CCCCCC"/>
                 </a:solidFill>
                 <a:latin typeface="Consolas"/>
               </a:defRPr>
             </a:pPr>
             <a:r>
-              <a:t>  ANOVA table, Pareto chart, main-effects plots generated</a:t>
+              <a:t>  ANOVA table, Pareto chart, main-effects plots</a:t>
             </a:r>
           </a:p>
           <a:p>
             <a:pPr>
               <a:spcAft>
-                <a:spcPts val="200"/>
+                <a:spcPts val="100"/>
               </a:spcAft>
-              <a:defRPr sz="1800">
-                <a:solidFill>
-                  <a:srgbClr val="D4D4D4"/>
+              <a:defRPr sz="1500">
+                <a:solidFill>
+                  <a:srgbClr val="CCCCCC"/>
                 </a:solidFill>
                 <a:latin typeface="Consolas"/>
               </a:defRPr>
@@ -6048,11 +7698,11 @@
           <a:p>
             <a:pPr>
               <a:spcAft>
-                <a:spcPts val="200"/>
+                <a:spcPts val="100"/>
               </a:spcAft>
-              <a:defRPr sz="1800">
-                <a:solidFill>
-                  <a:srgbClr val="D4D4D4"/>
+              <a:defRPr sz="1500">
+                <a:solidFill>
+                  <a:srgbClr val="6EC86E"/>
                 </a:solidFill>
                 <a:latin typeface="Consolas"/>
               </a:defRPr>
@@ -6064,31 +7714,31 @@
           <a:p>
             <a:pPr>
               <a:spcAft>
-                <a:spcPts val="200"/>
+                <a:spcPts val="100"/>
               </a:spcAft>
-              <a:defRPr sz="1800">
-                <a:solidFill>
-                  <a:srgbClr val="D4D4D4"/>
+              <a:defRPr sz="1500">
+                <a:solidFill>
+                  <a:srgbClr val="CCCCCC"/>
                 </a:solidFill>
                 <a:latin typeface="Consolas"/>
               </a:defRPr>
             </a:pPr>
             <a:r>
-              <a:t>  Recommended settings: temperature=180, pressure=3.5</a:t>
-            </a:r>
-          </a:p>
-        </p:txBody>
-      </p:sp>
-      <p:sp>
-        <p:nvSpPr>
-          <p:cNvPr id="5" name="TextBox 4"/>
+              <a:t>  Recommended: temperature=180, pressure=3.5</a:t>
+            </a:r>
+          </a:p>
+        </p:txBody>
+      </p:sp>
+      <p:sp>
+        <p:nvSpPr>
+          <p:cNvPr id="7" name="TextBox 6"/>
           <p:cNvSpPr txBox="1"/>
           <p:nvPr/>
         </p:nvSpPr>
         <p:spPr>
           <a:xfrm>
-            <a:off x="731520" y="5760720"/>
-            <a:ext cx="10058400" cy="731520"/>
+            <a:off x="822960" y="5349240"/>
+            <a:ext cx="10058400" cy="640080"/>
           </a:xfrm>
           <a:prstGeom prst="rect">
             <a:avLst/>
@@ -6101,16 +7751,52 @@
           </a:bodyPr>
           <a:lstStyle/>
           <a:p>
-            <a:pPr>
-              <a:defRPr sz="1600" i="1">
+            <a:pPr algn="l">
+              <a:defRPr sz="1400" b="0">
                 <a:solidFill>
                   <a:srgbClr val="666666"/>
                 </a:solidFill>
-                <a:latin typeface="Calibri"/>
+                <a:latin typeface="Inter"/>
               </a:defRPr>
             </a:pPr>
             <a:r>
               <a:t>doe-helper provides a complete CLI workflow from design to optimisation</a:t>
+            </a:r>
+          </a:p>
+        </p:txBody>
+      </p:sp>
+      <p:sp>
+        <p:nvSpPr>
+          <p:cNvPr id="8" name="TextBox 7"/>
+          <p:cNvSpPr txBox="1"/>
+          <p:nvPr/>
+        </p:nvSpPr>
+        <p:spPr>
+          <a:xfrm>
+            <a:off x="731520" y="6400800"/>
+            <a:ext cx="10058400" cy="365760"/>
+          </a:xfrm>
+          <a:prstGeom prst="rect">
+            <a:avLst/>
+          </a:prstGeom>
+          <a:noFill/>
+        </p:spPr>
+        <p:txBody>
+          <a:bodyPr wrap="square">
+            <a:spAutoFit/>
+          </a:bodyPr>
+          <a:lstStyle/>
+          <a:p>
+            <a:pPr algn="l">
+              <a:defRPr sz="1000" b="0">
+                <a:solidFill>
+                  <a:srgbClr val="999999"/>
+                </a:solidFill>
+                <a:latin typeface="Consolas"/>
+              </a:defRPr>
+            </a:pPr>
+            <a:r>
+              <a:t>© 2026 Martin J. Gallagher  |  GPL-3.0-or-later  |  doehelper.com</a:t>
             </a:r>
           </a:p>
         </p:txBody>
